--- a/Assignment 1/MAS512_assignment1_gr5.pptx
+++ b/Assignment 1/MAS512_assignment1_gr5.pptx
@@ -4636,7 +4636,7 @@
                 <a:ea typeface="Calibri" pitchFamily="34" charset="-122"/>
                 <a:cs typeface="Calibri" pitchFamily="34" charset="-120"/>
               </a:rPr>
-              <a:t>YOLO11n trained on auto-annotated L515 frames: mAP50 = 0.xx on unseen test video; depth read at the box centre</a:t>
+              <a:t>YOLO11n trained on auto-annotated L515 frames: mAP50 = 0.92 (mAP50-95 = 0.31) on unseen test video; depth read at the box centre</a:t>
             </a:r>
             <a:endParaRPr lang="en-US" sz="1300" dirty="0"/>
           </a:p>
@@ -4739,7 +4739,7 @@
                 <a:ea typeface="Calibri" pitchFamily="34" charset="-122"/>
                 <a:cs typeface="Calibri" pitchFamily="34" charset="-120"/>
               </a:rPr>
-              <a:t>Trajectory of the load recovered in ___ % of frames</a:t>
+              <a:t>Trajectory of the load recovered in 100 % of the 150 test frames</a:t>
             </a:r>
             <a:endParaRPr lang="en-US" sz="1300" dirty="0"/>
           </a:p>
@@ -4842,7 +4842,7 @@
                 <a:ea typeface="Calibri" pitchFamily="34" charset="-122"/>
                 <a:cs typeface="Calibri" pitchFamily="34" charset="-120"/>
               </a:rPr>
-              <a:t>Pretrained COCO segmentation + ByteTrack: ___ persons tracked, region counting works without training</a:t>
+              <a:t>Pretrained COCO segmentation + ByteTrack: 14 persons tracked, up to 8 at once, region counting works without any training</a:t>
             </a:r>
             <a:endParaRPr lang="en-US" sz="1300" dirty="0"/>
           </a:p>
@@ -8625,7 +8625,7 @@
                 <a:ea typeface="Cambria" pitchFamily="34" charset="-122"/>
                 <a:cs typeface="Cambria" pitchFamily="34" charset="-120"/>
               </a:rPr>
-              <a:t>0.xx</a:t>
+              <a:t>0.898</a:t>
             </a:r>
             <a:endParaRPr lang="en-US" sz="3400" dirty="0"/>
           </a:p>
@@ -8703,7 +8703,7 @@
                 <a:ea typeface="Cambria" pitchFamily="34" charset="-122"/>
                 <a:cs typeface="Cambria" pitchFamily="34" charset="-120"/>
               </a:rPr>
-              <a:t>0.xx</a:t>
+              <a:t>0.887</a:t>
             </a:r>
             <a:endParaRPr lang="en-US" sz="3400" dirty="0"/>
           </a:p>
@@ -8781,7 +8781,7 @@
                 <a:ea typeface="Cambria" pitchFamily="34" charset="-122"/>
                 <a:cs typeface="Cambria" pitchFamily="34" charset="-120"/>
               </a:rPr>
-              <a:t>0.xx</a:t>
+              <a:t>0.920</a:t>
             </a:r>
             <a:endParaRPr lang="en-US" sz="3400" dirty="0"/>
           </a:p>
@@ -8859,7 +8859,7 @@
                 <a:ea typeface="Cambria" pitchFamily="34" charset="-122"/>
                 <a:cs typeface="Cambria" pitchFamily="34" charset="-120"/>
               </a:rPr>
-              <a:t>0.xx</a:t>
+              <a:t>0.312</a:t>
             </a:r>
             <a:endParaRPr lang="en-US" sz="3400" dirty="0"/>
           </a:p>
@@ -8904,175 +8904,55 @@
           </a:p>
         </p:txBody>
       </p:sp>
-      <p:sp>
-        <p:nvSpPr>
-          <p:cNvPr id="13" name="Shape 11"/>
-          <p:cNvSpPr/>
-          <p:nvPr/>
-        </p:nvSpPr>
-        <p:spPr>
-          <a:xfrm>
-            <a:off x="457200" y="2514600"/>
-            <a:ext cx="4023360" cy="2103120"/>
-          </a:xfrm>
-          <a:prstGeom prst="roundRect">
-            <a:avLst>
-              <a:gd name="adj" fmla="val 3478"/>
-            </a:avLst>
-          </a:prstGeom>
-          <a:solidFill>
-            <a:srgbClr val="EEF0F4"/>
-          </a:solidFill>
-          <a:ln w="12700">
-            <a:solidFill>
-              <a:srgbClr val="8A93A6"/>
-            </a:solidFill>
-            <a:prstDash val="dash"/>
-          </a:ln>
-        </p:spPr>
-      </p:sp>
-      <p:sp>
-        <p:nvSpPr>
-          <p:cNvPr id="14" name="Text 12"/>
-          <p:cNvSpPr txBox="1"/>
-          <p:nvPr/>
-        </p:nvSpPr>
-        <p:spPr>
-          <a:xfrm>
-            <a:off x="594360" y="2514600"/>
-            <a:ext cx="3749040" cy="2103120"/>
-          </a:xfrm>
-          <a:prstGeom prst="rect">
-            <a:avLst/>
-          </a:prstGeom>
-          <a:noFill/>
-          <a:ln/>
-        </p:spPr>
-        <p:txBody>
-          <a:bodyPr wrap="square" lIns="0" tIns="0" rIns="0" bIns="0" rtlCol="0" anchor="ctr"/>
-          <a:lstStyle/>
-          <a:p>
-            <a:pPr algn="ctr" indent="0" marL="0">
-              <a:buNone/>
-            </a:pPr>
-            <a:r>
-              <a:rPr lang="en-US" sz="1100" b="1" dirty="0">
-                <a:solidFill>
-                  <a:srgbClr val="F2A33C"/>
-                </a:solidFill>
-                <a:latin typeface="Calibri" pitchFamily="34" charset="0"/>
-                <a:ea typeface="Calibri" pitchFamily="34" charset="-122"/>
-                <a:cs typeface="Calibri" pitchFamily="34" charset="-120"/>
-              </a:rPr>
-              <a:t>INSERT</a:t>
-            </a:r>
-            <a:endParaRPr lang="en-US" sz="1100" dirty="0"/>
-          </a:p>
-          <a:p>
-            <a:pPr algn="ctr" indent="0" marL="0">
-              <a:buNone/>
-            </a:pPr>
-            <a:r>
-              <a:rPr lang="en-US" sz="1100" dirty="0">
-                <a:solidFill>
-                  <a:srgbClr val="8A93A6"/>
-                </a:solidFill>
-                <a:latin typeface="Calibri" pitchFamily="34" charset="0"/>
-                <a:ea typeface="Calibri" pitchFamily="34" charset="-122"/>
-                <a:cs typeface="Calibri" pitchFamily="34" charset="-120"/>
-              </a:rPr>
-              <a:t>runs/test_eval — PR curve or F1 curve (PR_curve.png)</a:t>
-            </a:r>
-            <a:endParaRPr lang="en-US" sz="1100" dirty="0"/>
-          </a:p>
-        </p:txBody>
-      </p:sp>
-      <p:sp>
-        <p:nvSpPr>
-          <p:cNvPr id="15" name="Shape 13"/>
-          <p:cNvSpPr/>
-          <p:nvPr/>
-        </p:nvSpPr>
-        <p:spPr>
-          <a:xfrm>
-            <a:off x="4663440" y="2514600"/>
-            <a:ext cx="4023360" cy="2103120"/>
-          </a:xfrm>
-          <a:prstGeom prst="roundRect">
-            <a:avLst>
-              <a:gd name="adj" fmla="val 3478"/>
-            </a:avLst>
-          </a:prstGeom>
-          <a:solidFill>
-            <a:srgbClr val="EEF0F4"/>
-          </a:solidFill>
-          <a:ln w="12700">
-            <a:solidFill>
-              <a:srgbClr val="8A93A6"/>
-            </a:solidFill>
-            <a:prstDash val="dash"/>
-          </a:ln>
-        </p:spPr>
-      </p:sp>
-      <p:sp>
-        <p:nvSpPr>
-          <p:cNvPr id="16" name="Text 14"/>
-          <p:cNvSpPr txBox="1"/>
-          <p:nvPr/>
-        </p:nvSpPr>
-        <p:spPr>
-          <a:xfrm>
-            <a:off x="4800600" y="2514600"/>
-            <a:ext cx="3749040" cy="2103120"/>
-          </a:xfrm>
-          <a:prstGeom prst="rect">
-            <a:avLst/>
-          </a:prstGeom>
-          <a:noFill/>
-          <a:ln/>
-        </p:spPr>
-        <p:txBody>
-          <a:bodyPr wrap="square" lIns="0" tIns="0" rIns="0" bIns="0" rtlCol="0" anchor="ctr"/>
-          <a:lstStyle/>
-          <a:p>
-            <a:pPr algn="ctr" indent="0" marL="0">
-              <a:buNone/>
-            </a:pPr>
-            <a:r>
-              <a:rPr lang="en-US" sz="1100" b="1" dirty="0">
-                <a:solidFill>
-                  <a:srgbClr val="F2A33C"/>
-                </a:solidFill>
-                <a:latin typeface="Calibri" pitchFamily="34" charset="0"/>
-                <a:ea typeface="Calibri" pitchFamily="34" charset="-122"/>
-                <a:cs typeface="Calibri" pitchFamily="34" charset="-120"/>
-              </a:rPr>
-              <a:t>INSERT</a:t>
-            </a:r>
-            <a:endParaRPr lang="en-US" sz="1100" dirty="0"/>
-          </a:p>
-          <a:p>
-            <a:pPr algn="ctr" indent="0" marL="0">
-              <a:buNone/>
-            </a:pPr>
-            <a:r>
-              <a:rPr lang="en-US" sz="1100" dirty="0">
-                <a:solidFill>
-                  <a:srgbClr val="8A93A6"/>
-                </a:solidFill>
-                <a:latin typeface="Calibri" pitchFamily="34" charset="0"/>
-                <a:ea typeface="Calibri" pitchFamily="34" charset="-122"/>
-                <a:cs typeface="Calibri" pitchFamily="34" charset="-120"/>
-              </a:rPr>
-              <a:t>runs/test_eval — confusion matrix or training loss curves (results.png)</a:t>
-            </a:r>
-            <a:endParaRPr lang="en-US" sz="1100" dirty="0"/>
-          </a:p>
-        </p:txBody>
-      </p:sp>
-      <p:sp>
-        <p:nvSpPr>
-          <p:cNvPr id="17" name="Text 15"/>
+      <p:pic>
+        <p:nvPicPr>
+          <p:cNvPr id="13" name="Image 0" descr="/home/claude/deck/pr_f.png">    </p:cNvPr>
+          <p:cNvPicPr>
+            <a:picLocks noChangeAspect="1"/>
+          </p:cNvPicPr>
+          <p:nvPr/>
+        </p:nvPicPr>
+        <p:blipFill>
+          <a:blip r:embed="rId1"/>
+          <a:srcRect l="0" r="0" t="0" b="0"/>
+          <a:stretch/>
+        </p:blipFill>
+        <p:spPr>
+          <a:xfrm>
+            <a:off x="457200" y="2468880"/>
+            <a:ext cx="4023360" cy="2194560"/>
+          </a:xfrm>
+          <a:prstGeom prst="rect">
+            <a:avLst/>
+          </a:prstGeom>
+        </p:spPr>
+      </p:pic>
+      <p:pic>
+        <p:nvPicPr>
+          <p:cNvPr id="14" name="Image 1" descr="/home/claude/deck/cm_f.png">    </p:cNvPr>
+          <p:cNvPicPr>
+            <a:picLocks noChangeAspect="1"/>
+          </p:cNvPicPr>
+          <p:nvPr/>
+        </p:nvPicPr>
+        <p:blipFill>
+          <a:blip r:embed="rId2"/>
+          <a:srcRect l="0" r="0" t="0" b="0"/>
+          <a:stretch/>
+        </p:blipFill>
+        <p:spPr>
+          <a:xfrm>
+            <a:off x="4663440" y="2468880"/>
+            <a:ext cx="4023360" cy="2194560"/>
+          </a:xfrm>
+          <a:prstGeom prst="rect">
+            <a:avLst/>
+          </a:prstGeom>
+        </p:spPr>
+      </p:pic>
+      <p:sp>
+        <p:nvSpPr>
+          <p:cNvPr id="15" name="Text 11"/>
           <p:cNvSpPr txBox="1"/>
           <p:nvPr/>
         </p:nvSpPr>
@@ -9103,7 +8983,7 @@
                 <a:ea typeface="Calibri" pitchFamily="34" charset="-122"/>
                 <a:cs typeface="Calibri" pitchFamily="34" charset="-120"/>
               </a:rPr>
-              <a:t>Q1 · Replace 0.xx with the values printed by model.val(); n test frames = ___</a:t>
+              <a:t>Q1 · P and R reported at the F1-optimal confidence (0.52). Confusion matrix (conf 0.25): 147 detected, 3 missed, 6 false positives of 150 test frames.</a:t>
             </a:r>
             <a:endParaRPr lang="en-US" sz="900" dirty="0"/>
           </a:p>
@@ -9244,92 +9124,32 @@
           </a:p>
         </p:txBody>
       </p:sp>
-      <p:sp>
-        <p:nvSpPr>
-          <p:cNvPr id="5" name="Shape 3"/>
-          <p:cNvSpPr/>
-          <p:nvPr/>
-        </p:nvSpPr>
-        <p:spPr>
-          <a:xfrm>
-            <a:off x="457200" y="1188720"/>
-            <a:ext cx="8229600" cy="1554480"/>
-          </a:xfrm>
-          <a:prstGeom prst="roundRect">
-            <a:avLst>
-              <a:gd name="adj" fmla="val 4706"/>
-            </a:avLst>
-          </a:prstGeom>
-          <a:solidFill>
-            <a:srgbClr val="EEF0F4"/>
-          </a:solidFill>
-          <a:ln w="12700">
-            <a:solidFill>
-              <a:srgbClr val="8A93A6"/>
-            </a:solidFill>
-            <a:prstDash val="dash"/>
-          </a:ln>
-        </p:spPr>
-      </p:sp>
-      <p:sp>
-        <p:nvSpPr>
-          <p:cNvPr id="6" name="Text 4"/>
-          <p:cNvSpPr txBox="1"/>
-          <p:nvPr/>
-        </p:nvSpPr>
-        <p:spPr>
-          <a:xfrm>
-            <a:off x="594360" y="1188720"/>
-            <a:ext cx="7955280" cy="1554480"/>
-          </a:xfrm>
-          <a:prstGeom prst="rect">
-            <a:avLst/>
-          </a:prstGeom>
-          <a:noFill/>
-          <a:ln/>
-        </p:spPr>
-        <p:txBody>
-          <a:bodyPr wrap="square" lIns="0" tIns="0" rIns="0" bIns="0" rtlCol="0" anchor="ctr"/>
-          <a:lstStyle/>
-          <a:p>
-            <a:pPr algn="ctr" indent="0" marL="0">
-              <a:buNone/>
-            </a:pPr>
-            <a:r>
-              <a:rPr lang="en-US" sz="1100" b="1" dirty="0">
-                <a:solidFill>
-                  <a:srgbClr val="F2A33C"/>
-                </a:solidFill>
-                <a:latin typeface="Calibri" pitchFamily="34" charset="0"/>
-                <a:ea typeface="Calibri" pitchFamily="34" charset="-122"/>
-                <a:cs typeface="Calibri" pitchFamily="34" charset="-120"/>
-              </a:rPr>
-              <a:t>INSERT</a:t>
-            </a:r>
-            <a:endParaRPr lang="en-US" sz="1100" dirty="0"/>
-          </a:p>
-          <a:p>
-            <a:pPr algn="ctr" indent="0" marL="0">
-              <a:buNone/>
-            </a:pPr>
-            <a:r>
-              <a:rPr lang="en-US" sz="1100" dirty="0">
-                <a:solidFill>
-                  <a:srgbClr val="8A93A6"/>
-                </a:solidFill>
-                <a:latin typeface="Calibri" pitchFamily="34" charset="0"/>
-                <a:ea typeface="Calibri" pitchFamily="34" charset="-122"/>
-                <a:cs typeface="Calibri" pitchFamily="34" charset="-120"/>
-              </a:rPr>
-              <a:t>Five random test frames with bounding box (green) and centre (red) — the figure from the Q1 b) cell</a:t>
-            </a:r>
-            <a:endParaRPr lang="en-US" sz="1100" dirty="0"/>
-          </a:p>
-        </p:txBody>
-      </p:sp>
-      <p:sp>
-        <p:nvSpPr>
-          <p:cNvPr id="7" name="Shape 5"/>
+      <p:pic>
+        <p:nvPicPr>
+          <p:cNvPr id="5" name="Image 0" descr="/home/claude/deck/q1b_f.png">    </p:cNvPr>
+          <p:cNvPicPr>
+            <a:picLocks noChangeAspect="1"/>
+          </p:cNvPicPr>
+          <p:nvPr/>
+        </p:nvPicPr>
+        <p:blipFill>
+          <a:blip r:embed="rId1"/>
+          <a:srcRect l="0" r="0" t="0" b="0"/>
+          <a:stretch/>
+        </p:blipFill>
+        <p:spPr>
+          <a:xfrm>
+            <a:off x="457200" y="1143000"/>
+            <a:ext cx="8229600" cy="1600200"/>
+          </a:xfrm>
+          <a:prstGeom prst="rect">
+            <a:avLst/>
+          </a:prstGeom>
+        </p:spPr>
+      </p:pic>
+      <p:sp>
+        <p:nvSpPr>
+          <p:cNvPr id="6" name="Shape 3"/>
           <p:cNvSpPr/>
           <p:nvPr/>
         </p:nvSpPr>
@@ -9363,7 +9183,7 @@
       </p:sp>
       <p:sp>
         <p:nvSpPr>
-          <p:cNvPr id="8" name="Text 6"/>
+          <p:cNvPr id="7" name="Text 4"/>
           <p:cNvSpPr txBox="1"/>
           <p:nvPr/>
         </p:nvSpPr>
@@ -9402,7 +9222,7 @@
       </p:sp>
       <p:sp>
         <p:nvSpPr>
-          <p:cNvPr id="9" name="Text 7"/>
+          <p:cNvPr id="8" name="Text 5"/>
           <p:cNvSpPr txBox="1"/>
           <p:nvPr/>
         </p:nvSpPr>
@@ -9437,7 +9257,7 @@
                 <a:ea typeface="Calibri" pitchFamily="34" charset="-122"/>
                 <a:cs typeface="Calibri" pitchFamily="34" charset="-120"/>
               </a:rPr>
-              <a:t>Load detected in ___ of ___ frames</a:t>
+              <a:t>Load detected in 147 of 150 frames (missed frames 101, 106, 107)</a:t>
             </a:r>
             <a:endParaRPr lang="en-US" sz="1200" dirty="0"/>
           </a:p>
@@ -9458,7 +9278,7 @@
                 <a:ea typeface="Calibri" pitchFamily="34" charset="-122"/>
                 <a:cs typeface="Calibri" pitchFamily="34" charset="-120"/>
               </a:rPr>
-              <a:t>Valid depth in ___ frames (0 = no L515 measurement)</a:t>
+              <a:t>Valid depth in 145 frames (0 = no L515 measurement)</a:t>
             </a:r>
             <a:endParaRPr lang="en-US" sz="1200" dirty="0"/>
           </a:p>
@@ -9479,98 +9299,38 @@
                 <a:ea typeface="Calibri" pitchFamily="34" charset="-122"/>
                 <a:cs typeface="Calibri" pitchFamily="34" charset="-120"/>
               </a:rPr>
-              <a:t>Depth range ___ – ___ m, full table in runs/q1c_center_depth.csv</a:t>
+              <a:t>Depth 2.73 – 3.86 m (median 3.16 m); the swing period is visible in both centre_x and depth</a:t>
             </a:r>
             <a:endParaRPr lang="en-US" sz="1200" dirty="0"/>
           </a:p>
         </p:txBody>
       </p:sp>
-      <p:sp>
-        <p:nvSpPr>
-          <p:cNvPr id="10" name="Shape 8"/>
-          <p:cNvSpPr/>
-          <p:nvPr/>
-        </p:nvSpPr>
-        <p:spPr>
-          <a:xfrm>
-            <a:off x="4572000" y="2926080"/>
-            <a:ext cx="4114800" cy="1691640"/>
-          </a:xfrm>
-          <a:prstGeom prst="roundRect">
-            <a:avLst>
-              <a:gd name="adj" fmla="val 4324"/>
-            </a:avLst>
-          </a:prstGeom>
-          <a:solidFill>
-            <a:srgbClr val="EEF0F4"/>
-          </a:solidFill>
-          <a:ln w="12700">
-            <a:solidFill>
-              <a:srgbClr val="8A93A6"/>
-            </a:solidFill>
-            <a:prstDash val="dash"/>
-          </a:ln>
-        </p:spPr>
-      </p:sp>
-      <p:sp>
-        <p:nvSpPr>
-          <p:cNvPr id="11" name="Text 9"/>
-          <p:cNvSpPr txBox="1"/>
-          <p:nvPr/>
-        </p:nvSpPr>
-        <p:spPr>
-          <a:xfrm>
-            <a:off x="4709160" y="2926080"/>
-            <a:ext cx="3840480" cy="1691640"/>
-          </a:xfrm>
-          <a:prstGeom prst="rect">
-            <a:avLst/>
-          </a:prstGeom>
-          <a:noFill/>
-          <a:ln/>
-        </p:spPr>
-        <p:txBody>
-          <a:bodyPr wrap="square" lIns="0" tIns="0" rIns="0" bIns="0" rtlCol="0" anchor="ctr"/>
-          <a:lstStyle/>
-          <a:p>
-            <a:pPr algn="ctr" indent="0" marL="0">
-              <a:buNone/>
-            </a:pPr>
-            <a:r>
-              <a:rPr lang="en-US" sz="1100" b="1" dirty="0">
-                <a:solidFill>
-                  <a:srgbClr val="F2A33C"/>
-                </a:solidFill>
-                <a:latin typeface="Calibri" pitchFamily="34" charset="0"/>
-                <a:ea typeface="Calibri" pitchFamily="34" charset="-122"/>
-                <a:cs typeface="Calibri" pitchFamily="34" charset="-120"/>
-              </a:rPr>
-              <a:t>INSERT</a:t>
-            </a:r>
-            <a:endParaRPr lang="en-US" sz="1100" dirty="0"/>
-          </a:p>
-          <a:p>
-            <a:pPr algn="ctr" indent="0" marL="0">
-              <a:buNone/>
-            </a:pPr>
-            <a:r>
-              <a:rPr lang="en-US" sz="1100" dirty="0">
-                <a:solidFill>
-                  <a:srgbClr val="8A93A6"/>
-                </a:solidFill>
-                <a:latin typeface="Calibri" pitchFamily="34" charset="0"/>
-                <a:ea typeface="Calibri" pitchFamily="34" charset="-122"/>
-                <a:cs typeface="Calibri" pitchFamily="34" charset="-120"/>
-              </a:rPr>
-              <a:t>Plot: center_x / center_y and depth vs. frame (DEBUG plot) or a 5-row excerpt of the CSV</a:t>
-            </a:r>
-            <a:endParaRPr lang="en-US" sz="1100" dirty="0"/>
-          </a:p>
-        </p:txBody>
-      </p:sp>
-      <p:sp>
-        <p:nvSpPr>
-          <p:cNvPr id="12" name="Text 10"/>
+      <p:pic>
+        <p:nvPicPr>
+          <p:cNvPr id="9" name="Image 1" descr="/home/claude/deck/q1c_f.png">    </p:cNvPr>
+          <p:cNvPicPr>
+            <a:picLocks noChangeAspect="1"/>
+          </p:cNvPicPr>
+          <p:nvPr/>
+        </p:nvPicPr>
+        <p:blipFill>
+          <a:blip r:embed="rId2"/>
+          <a:srcRect l="0" r="0" t="0" b="0"/>
+          <a:stretch/>
+        </p:blipFill>
+        <p:spPr>
+          <a:xfrm>
+            <a:off x="4572000" y="2880360"/>
+            <a:ext cx="4114800" cy="1783080"/>
+          </a:xfrm>
+          <a:prstGeom prst="rect">
+            <a:avLst/>
+          </a:prstGeom>
+        </p:spPr>
+      </p:pic>
+      <p:sp>
+        <p:nvSpPr>
+          <p:cNvPr id="10" name="Text 6"/>
           <p:cNvSpPr txBox="1"/>
           <p:nvPr/>
         </p:nvSpPr>
@@ -9601,7 +9361,7 @@
                 <a:ea typeface="Calibri" pitchFamily="34" charset="-122"/>
                 <a:cs typeface="Calibri" pitchFamily="34" charset="-120"/>
               </a:rPr>
-              <a:t>Q1 · Depth is read from depth_raw/*.npy, not from the depth video, to avoid colour-map quantisation.</a:t>
+              <a:t>Q1 · Depth read from depth_raw/*.npy (not the depth video) to avoid colour-map quantisation. Full table: runs/q1c_center_depth.csv</a:t>
             </a:r>
             <a:endParaRPr lang="en-US" sz="900" dirty="0"/>
           </a:p>
@@ -9751,11 +9511,11 @@
         <p:spPr>
           <a:xfrm>
             <a:off x="457200" y="1188720"/>
-            <a:ext cx="2743200" cy="3429000"/>
+            <a:ext cx="2194560" cy="3429000"/>
           </a:xfrm>
           <a:prstGeom prst="roundRect">
             <a:avLst>
-              <a:gd name="adj" fmla="val 2667"/>
+              <a:gd name="adj" fmla="val 3333"/>
             </a:avLst>
           </a:prstGeom>
           <a:solidFill>
@@ -9785,7 +9545,7 @@
         <p:spPr>
           <a:xfrm>
             <a:off x="685800" y="1353312"/>
-            <a:ext cx="2286000" cy="365760"/>
+            <a:ext cx="1737360" cy="365760"/>
           </a:xfrm>
           <a:prstGeom prst="rect">
             <a:avLst/>
@@ -9824,7 +9584,7 @@
         <p:spPr>
           <a:xfrm>
             <a:off x="685800" y="1755648"/>
-            <a:ext cx="2286000" cy="2697480"/>
+            <a:ext cx="1737360" cy="2697480"/>
           </a:xfrm>
           <a:prstGeom prst="rect">
             <a:avLst/>
@@ -9887,12 +9647,12 @@
         </p:nvSpPr>
         <p:spPr>
           <a:xfrm>
-            <a:off x="3383280" y="1188720"/>
-            <a:ext cx="2743200" cy="3429000"/>
+            <a:off x="2788920" y="1188720"/>
+            <a:ext cx="2514600" cy="3429000"/>
           </a:xfrm>
           <a:prstGeom prst="roundRect">
             <a:avLst>
-              <a:gd name="adj" fmla="val 2667"/>
+              <a:gd name="adj" fmla="val 2909"/>
             </a:avLst>
           </a:prstGeom>
           <a:solidFill>
@@ -9921,8 +9681,8 @@
         </p:nvSpPr>
         <p:spPr>
           <a:xfrm>
-            <a:off x="3611880" y="1353312"/>
-            <a:ext cx="2286000" cy="365760"/>
+            <a:off x="3017520" y="1353312"/>
+            <a:ext cx="2057400" cy="365760"/>
           </a:xfrm>
           <a:prstGeom prst="rect">
             <a:avLst/>
@@ -9960,8 +9720,8 @@
         </p:nvSpPr>
         <p:spPr>
           <a:xfrm>
-            <a:off x="3611880" y="1755648"/>
-            <a:ext cx="2286000" cy="2697480"/>
+            <a:off x="3017520" y="1755648"/>
+            <a:ext cx="2057400" cy="2697480"/>
           </a:xfrm>
           <a:prstGeom prst="rect">
             <a:avLst/>
@@ -10058,92 +9818,32 @@
           </a:p>
         </p:txBody>
       </p:sp>
-      <p:sp>
-        <p:nvSpPr>
-          <p:cNvPr id="11" name="Shape 9"/>
-          <p:cNvSpPr/>
-          <p:nvPr/>
-        </p:nvSpPr>
-        <p:spPr>
-          <a:xfrm>
-            <a:off x="6309360" y="1188720"/>
-            <a:ext cx="2377440" cy="3429000"/>
-          </a:xfrm>
-          <a:prstGeom prst="roundRect">
-            <a:avLst>
-              <a:gd name="adj" fmla="val 3077"/>
-            </a:avLst>
-          </a:prstGeom>
-          <a:solidFill>
-            <a:srgbClr val="EEF0F4"/>
-          </a:solidFill>
-          <a:ln w="12700">
-            <a:solidFill>
-              <a:srgbClr val="8A93A6"/>
-            </a:solidFill>
-            <a:prstDash val="dash"/>
-          </a:ln>
-        </p:spPr>
-      </p:sp>
-      <p:sp>
-        <p:nvSpPr>
-          <p:cNvPr id="12" name="Text 10"/>
-          <p:cNvSpPr txBox="1"/>
-          <p:nvPr/>
-        </p:nvSpPr>
-        <p:spPr>
-          <a:xfrm>
-            <a:off x="6446520" y="1188720"/>
-            <a:ext cx="2103120" cy="3429000"/>
-          </a:xfrm>
-          <a:prstGeom prst="rect">
-            <a:avLst/>
-          </a:prstGeom>
-          <a:noFill/>
-          <a:ln/>
-        </p:spPr>
-        <p:txBody>
-          <a:bodyPr wrap="square" lIns="0" tIns="0" rIns="0" bIns="0" rtlCol="0" anchor="ctr"/>
-          <a:lstStyle/>
-          <a:p>
-            <a:pPr algn="ctr" indent="0" marL="0">
-              <a:buNone/>
-            </a:pPr>
-            <a:r>
-              <a:rPr lang="en-US" sz="1100" b="1" dirty="0">
-                <a:solidFill>
-                  <a:srgbClr val="F2A33C"/>
-                </a:solidFill>
-                <a:latin typeface="Calibri" pitchFamily="34" charset="0"/>
-                <a:ea typeface="Calibri" pitchFamily="34" charset="-122"/>
-                <a:cs typeface="Calibri" pitchFamily="34" charset="-120"/>
-              </a:rPr>
-              <a:t>INSERT</a:t>
-            </a:r>
-            <a:endParaRPr lang="en-US" sz="1100" dirty="0"/>
-          </a:p>
-          <a:p>
-            <a:pPr algn="ctr" indent="0" marL="0">
-              <a:buNone/>
-            </a:pPr>
-            <a:r>
-              <a:rPr lang="en-US" sz="1100" dirty="0">
-                <a:solidFill>
-                  <a:srgbClr val="8A93A6"/>
-                </a:solidFill>
-                <a:latin typeface="Calibri" pitchFamily="34" charset="0"/>
-                <a:ea typeface="Calibri" pitchFamily="34" charset="-122"/>
-                <a:cs typeface="Calibri" pitchFamily="34" charset="-120"/>
-              </a:rPr>
-              <a:t>tracking/trajectory.png</a:t>
-            </a:r>
-            <a:endParaRPr lang="en-US" sz="1100" dirty="0"/>
-          </a:p>
-        </p:txBody>
-      </p:sp>
-      <p:sp>
-        <p:nvSpPr>
-          <p:cNvPr id="13" name="Text 11"/>
+      <p:pic>
+        <p:nvPicPr>
+          <p:cNvPr id="11" name="Image 0" descr="/home/claude/deck/traj_f.png">    </p:cNvPr>
+          <p:cNvPicPr>
+            <a:picLocks noChangeAspect="1"/>
+          </p:cNvPicPr>
+          <p:nvPr/>
+        </p:nvPicPr>
+        <p:blipFill>
+          <a:blip r:embed="rId1"/>
+          <a:srcRect l="0" r="0" t="0" b="0"/>
+          <a:stretch/>
+        </p:blipFill>
+        <p:spPr>
+          <a:xfrm>
+            <a:off x="5440680" y="1188720"/>
+            <a:ext cx="3246120" cy="3429000"/>
+          </a:xfrm>
+          <a:prstGeom prst="rect">
+            <a:avLst/>
+          </a:prstGeom>
+        </p:spPr>
+      </p:pic>
+      <p:sp>
+        <p:nvSpPr>
+          <p:cNvPr id="12" name="Text 9"/>
           <p:cNvSpPr txBox="1"/>
           <p:nvPr/>
         </p:nvSpPr>
@@ -10174,7 +9874,7 @@
                 <a:ea typeface="Calibri" pitchFamily="34" charset="-122"/>
                 <a:cs typeface="Calibri" pitchFamily="34" charset="-120"/>
               </a:rPr>
-              <a:t>Q2 · Result: load detected in ___ of ___ frames (___ %). Script: Q2_ObjectTracking.py</a:t>
+              <a:t>Q2 · Result: load detected in 150 of 150 frames (100 %) over 5.0 s; the trajectory traces the pendulum arc, with both swing directions overlapping. Script: Q2_ObjectTracking.py</a:t>
             </a:r>
             <a:endParaRPr lang="en-US" sz="900" dirty="0"/>
           </a:p>
@@ -11403,99 +11103,101 @@
           </a:p>
         </p:txBody>
       </p:sp>
-      <p:sp>
-        <p:nvSpPr>
-          <p:cNvPr id="5" name="Shape 3"/>
-          <p:cNvSpPr/>
-          <p:nvPr/>
-        </p:nvSpPr>
+      <p:pic>
+        <p:nvPicPr>
+          <p:cNvPr id="5" name="Image 0" descr="/home/claude/deck/q3a_f.png">    </p:cNvPr>
+          <p:cNvPicPr>
+            <a:picLocks noChangeAspect="1"/>
+          </p:cNvPicPr>
+          <p:nvPr/>
+        </p:nvPicPr>
+        <p:blipFill>
+          <a:blip r:embed="rId1"/>
+          <a:srcRect l="0" r="0" t="0" b="0"/>
+          <a:stretch/>
+        </p:blipFill>
         <p:spPr>
           <a:xfrm>
             <a:off x="457200" y="1188720"/>
-            <a:ext cx="5120640" cy="3429000"/>
-          </a:xfrm>
-          <a:prstGeom prst="roundRect">
-            <a:avLst>
-              <a:gd name="adj" fmla="val 2133"/>
-            </a:avLst>
-          </a:prstGeom>
-          <a:solidFill>
-            <a:srgbClr val="EEF0F4"/>
-          </a:solidFill>
-          <a:ln w="12700">
-            <a:solidFill>
-              <a:srgbClr val="8A93A6"/>
-            </a:solidFill>
-            <a:prstDash val="dash"/>
-          </a:ln>
-        </p:spPr>
-      </p:sp>
-      <p:sp>
-        <p:nvSpPr>
-          <p:cNvPr id="6" name="Text 4"/>
-          <p:cNvSpPr txBox="1"/>
-          <p:nvPr/>
-        </p:nvSpPr>
-        <p:spPr>
-          <a:xfrm>
-            <a:off x="594360" y="1188720"/>
-            <a:ext cx="4846320" cy="3429000"/>
-          </a:xfrm>
-          <a:prstGeom prst="rect">
-            <a:avLst/>
-          </a:prstGeom>
-          <a:noFill/>
-          <a:ln/>
-        </p:spPr>
-        <p:txBody>
-          <a:bodyPr wrap="square" lIns="0" tIns="0" rIns="0" bIns="0" rtlCol="0" anchor="ctr"/>
-          <a:lstStyle/>
-          <a:p>
-            <a:pPr algn="ctr" indent="0" marL="0">
-              <a:buNone/>
-            </a:pPr>
-            <a:r>
-              <a:rPr lang="en-US" sz="1100" b="1" dirty="0">
-                <a:solidFill>
-                  <a:srgbClr val="F2A33C"/>
-                </a:solidFill>
-                <a:latin typeface="Calibri" pitchFamily="34" charset="0"/>
-                <a:ea typeface="Calibri" pitchFamily="34" charset="-122"/>
-                <a:cs typeface="Calibri" pitchFamily="34" charset="-120"/>
-              </a:rPr>
-              <a:t>INSERT</a:t>
-            </a:r>
-            <a:endParaRPr lang="en-US" sz="1100" dirty="0"/>
-          </a:p>
-          <a:p>
-            <a:pPr algn="ctr" indent="0" marL="0">
-              <a:buNone/>
-            </a:pPr>
-            <a:r>
-              <a:rPr lang="en-US" sz="1100" dirty="0">
-                <a:solidFill>
-                  <a:srgbClr val="8A93A6"/>
-                </a:solidFill>
-                <a:latin typeface="Calibri" pitchFamily="34" charset="0"/>
-                <a:ea typeface="Calibri" pitchFamily="34" charset="-122"/>
-                <a:cs typeface="Calibri" pitchFamily="34" charset="-120"/>
-              </a:rPr>
-              <a:t>Frame from q3_output.mp4 showing masks, track IDs, region polygon and the four counters</a:t>
-            </a:r>
-            <a:endParaRPr lang="en-US" sz="1100" dirty="0"/>
-          </a:p>
-        </p:txBody>
-      </p:sp>
-      <p:sp>
-        <p:nvSpPr>
-          <p:cNvPr id="7" name="Text 5"/>
-          <p:cNvSpPr txBox="1"/>
-          <p:nvPr/>
-        </p:nvSpPr>
-        <p:spPr>
-          <a:xfrm>
-            <a:off x="5852160" y="1234440"/>
-            <a:ext cx="2743200" cy="685800"/>
+            <a:ext cx="1874520" cy="3246120"/>
+          </a:xfrm>
+          <a:prstGeom prst="rect">
+            <a:avLst/>
+          </a:prstGeom>
+        </p:spPr>
+      </p:pic>
+      <p:pic>
+        <p:nvPicPr>
+          <p:cNvPr id="6" name="Image 1" descr="/home/claude/deck/q3b_f.png">    </p:cNvPr>
+          <p:cNvPicPr>
+            <a:picLocks noChangeAspect="1"/>
+          </p:cNvPicPr>
+          <p:nvPr/>
+        </p:nvPicPr>
+        <p:blipFill>
+          <a:blip r:embed="rId2"/>
+          <a:srcRect l="0" r="0" t="0" b="0"/>
+          <a:stretch/>
+        </p:blipFill>
+        <p:spPr>
+          <a:xfrm>
+            <a:off x="2468880" y="1188720"/>
+            <a:ext cx="1874520" cy="3246120"/>
+          </a:xfrm>
+          <a:prstGeom prst="rect">
+            <a:avLst/>
+          </a:prstGeom>
+        </p:spPr>
+      </p:pic>
+      <p:sp>
+        <p:nvSpPr>
+          <p:cNvPr id="7" name="Text 3"/>
+          <p:cNvSpPr txBox="1"/>
+          <p:nvPr/>
+        </p:nvSpPr>
+        <p:spPr>
+          <a:xfrm>
+            <a:off x="457200" y="4498848"/>
+            <a:ext cx="4389120" cy="228600"/>
+          </a:xfrm>
+          <a:prstGeom prst="rect">
+            <a:avLst/>
+          </a:prstGeom>
+          <a:noFill/>
+          <a:ln/>
+        </p:spPr>
+        <p:txBody>
+          <a:bodyPr wrap="square" lIns="0" tIns="0" rIns="0" bIns="0" rtlCol="0" anchor="ctr"/>
+          <a:lstStyle/>
+          <a:p>
+            <a:pPr indent="0" marL="0">
+              <a:buNone/>
+            </a:pPr>
+            <a:r>
+              <a:rPr lang="en-US" sz="900" i="1" dirty="0">
+                <a:solidFill>
+                  <a:srgbClr val="7C8494"/>
+                </a:solidFill>
+                <a:latin typeface="Calibri" pitchFamily="34" charset="0"/>
+                <a:ea typeface="Calibri" pitchFamily="34" charset="-122"/>
+                <a:cs typeface="Calibri" pitchFamily="34" charset="-120"/>
+              </a:rPr>
+              <a:t>Frames 56 and 106 of q3_output.mp4 — masks and IDs (blue), region (magenta), centre dot green = inside</a:t>
+            </a:r>
+            <a:endParaRPr lang="en-US" sz="900" dirty="0"/>
+          </a:p>
+        </p:txBody>
+      </p:sp>
+      <p:sp>
+        <p:nvSpPr>
+          <p:cNvPr id="8" name="Text 4"/>
+          <p:cNvSpPr txBox="1"/>
+          <p:nvPr/>
+        </p:nvSpPr>
+        <p:spPr>
+          <a:xfrm>
+            <a:off x="4937760" y="1234440"/>
+            <a:ext cx="3657600" cy="685800"/>
           </a:xfrm>
           <a:prstGeom prst="rect">
             <a:avLst/>
@@ -11519,7 +11221,7 @@
                 <a:ea typeface="Cambria" pitchFamily="34" charset="-122"/>
                 <a:cs typeface="Cambria" pitchFamily="34" charset="-120"/>
               </a:rPr>
-              <a:t>—</a:t>
+              <a:t>14</a:t>
             </a:r>
             <a:endParaRPr lang="en-US" sz="3400" dirty="0"/>
           </a:p>
@@ -11527,14 +11229,14 @@
       </p:sp>
       <p:sp>
         <p:nvSpPr>
-          <p:cNvPr id="8" name="Text 6"/>
-          <p:cNvSpPr txBox="1"/>
-          <p:nvPr/>
-        </p:nvSpPr>
-        <p:spPr>
-          <a:xfrm>
-            <a:off x="5852160" y="1920240"/>
-            <a:ext cx="2743200" cy="320040"/>
+          <p:cNvPr id="9" name="Text 5"/>
+          <p:cNvSpPr txBox="1"/>
+          <p:nvPr/>
+        </p:nvSpPr>
+        <p:spPr>
+          <a:xfrm>
+            <a:off x="4937760" y="1920240"/>
+            <a:ext cx="3657600" cy="320040"/>
           </a:xfrm>
           <a:prstGeom prst="rect">
             <a:avLst/>
@@ -11558,7 +11260,7 @@
                 <a:ea typeface="Calibri" pitchFamily="34" charset="-122"/>
                 <a:cs typeface="Calibri" pitchFamily="34" charset="-120"/>
               </a:rPr>
-              <a:t>unique persons tracked (b)</a:t>
+              <a:t>unique persons tracked over 217 frames (b)</a:t>
             </a:r>
             <a:endParaRPr lang="en-US" sz="1100" dirty="0"/>
           </a:p>
@@ -11566,14 +11268,14 @@
       </p:sp>
       <p:sp>
         <p:nvSpPr>
-          <p:cNvPr id="9" name="Text 7"/>
-          <p:cNvSpPr txBox="1"/>
-          <p:nvPr/>
-        </p:nvSpPr>
-        <p:spPr>
-          <a:xfrm>
-            <a:off x="5852160" y="2331720"/>
-            <a:ext cx="2743200" cy="685800"/>
+          <p:cNvPr id="10" name="Text 6"/>
+          <p:cNvSpPr txBox="1"/>
+          <p:nvPr/>
+        </p:nvSpPr>
+        <p:spPr>
+          <a:xfrm>
+            <a:off x="4937760" y="2331720"/>
+            <a:ext cx="3657600" cy="685800"/>
           </a:xfrm>
           <a:prstGeom prst="rect">
             <a:avLst/>
@@ -11597,7 +11299,7 @@
                 <a:ea typeface="Cambria" pitchFamily="34" charset="-122"/>
                 <a:cs typeface="Cambria" pitchFamily="34" charset="-120"/>
               </a:rPr>
-              <a:t>—</a:t>
+              <a:t>8</a:t>
             </a:r>
             <a:endParaRPr lang="en-US" sz="3400" dirty="0"/>
           </a:p>
@@ -11605,14 +11307,14 @@
       </p:sp>
       <p:sp>
         <p:nvSpPr>
-          <p:cNvPr id="10" name="Text 8"/>
-          <p:cNvSpPr txBox="1"/>
-          <p:nvPr/>
-        </p:nvSpPr>
-        <p:spPr>
-          <a:xfrm>
-            <a:off x="5852160" y="3017520"/>
-            <a:ext cx="2743200" cy="320040"/>
+          <p:cNvPr id="11" name="Text 7"/>
+          <p:cNvSpPr txBox="1"/>
+          <p:nvPr/>
+        </p:nvSpPr>
+        <p:spPr>
+          <a:xfrm>
+            <a:off x="4937760" y="3017520"/>
+            <a:ext cx="3657600" cy="320040"/>
           </a:xfrm>
           <a:prstGeom prst="rect">
             <a:avLst/>
@@ -11636,7 +11338,7 @@
                 <a:ea typeface="Calibri" pitchFamily="34" charset="-122"/>
                 <a:cs typeface="Calibri" pitchFamily="34" charset="-120"/>
               </a:rPr>
-              <a:t>max in scene at once (b)</a:t>
+              <a:t>max persons in scene at once (b)</a:t>
             </a:r>
             <a:endParaRPr lang="en-US" sz="1100" dirty="0"/>
           </a:p>
@@ -11644,14 +11346,14 @@
       </p:sp>
       <p:sp>
         <p:nvSpPr>
-          <p:cNvPr id="11" name="Text 9"/>
-          <p:cNvSpPr txBox="1"/>
-          <p:nvPr/>
-        </p:nvSpPr>
-        <p:spPr>
-          <a:xfrm>
-            <a:off x="5852160" y="3429000"/>
-            <a:ext cx="2743200" cy="685800"/>
+          <p:cNvPr id="12" name="Text 8"/>
+          <p:cNvSpPr txBox="1"/>
+          <p:nvPr/>
+        </p:nvSpPr>
+        <p:spPr>
+          <a:xfrm>
+            <a:off x="4937760" y="3429000"/>
+            <a:ext cx="3657600" cy="685800"/>
           </a:xfrm>
           <a:prstGeom prst="rect">
             <a:avLst/>
@@ -11675,7 +11377,7 @@
                 <a:ea typeface="Cambria" pitchFamily="34" charset="-122"/>
                 <a:cs typeface="Cambria" pitchFamily="34" charset="-120"/>
               </a:rPr>
-              <a:t>—</a:t>
+              <a:t>4</a:t>
             </a:r>
             <a:endParaRPr lang="en-US" sz="3400" dirty="0"/>
           </a:p>
@@ -11683,14 +11385,14 @@
       </p:sp>
       <p:sp>
         <p:nvSpPr>
-          <p:cNvPr id="12" name="Text 10"/>
-          <p:cNvSpPr txBox="1"/>
-          <p:nvPr/>
-        </p:nvSpPr>
-        <p:spPr>
-          <a:xfrm>
-            <a:off x="5852160" y="4114800"/>
-            <a:ext cx="2743200" cy="320040"/>
+          <p:cNvPr id="13" name="Text 9"/>
+          <p:cNvSpPr txBox="1"/>
+          <p:nvPr/>
+        </p:nvSpPr>
+        <p:spPr>
+          <a:xfrm>
+            <a:off x="4937760" y="4114800"/>
+            <a:ext cx="3657600" cy="320040"/>
           </a:xfrm>
           <a:prstGeom prst="rect">
             <a:avLst/>
@@ -11714,7 +11416,7 @@
                 <a:ea typeface="Calibri" pitchFamily="34" charset="-122"/>
                 <a:cs typeface="Calibri" pitchFamily="34" charset="-120"/>
               </a:rPr>
-              <a:t>max inside region (d)</a:t>
+              <a:t>max persons inside region (d)</a:t>
             </a:r>
             <a:endParaRPr lang="en-US" sz="1100" dirty="0"/>
           </a:p>
@@ -11722,7 +11424,7 @@
       </p:sp>
       <p:sp>
         <p:nvSpPr>
-          <p:cNvPr id="13" name="Text 11"/>
+          <p:cNvPr id="14" name="Text 10"/>
           <p:cNvSpPr txBox="1"/>
           <p:nvPr/>
         </p:nvSpPr>
@@ -11753,7 +11455,7 @@
                 <a:ea typeface="Calibri" pitchFamily="34" charset="-122"/>
                 <a:cs typeface="Calibri" pitchFamily="34" charset="-120"/>
               </a:rPr>
-              <a:t>Q3 · Discuss: ID switches after occlusion inflate the unique count; ByteTrack vs BoT-SORT; box centre vs. feet as region test point.</a:t>
+              <a:t>Q3 · 432×768 px, 25 fps, 8.7 s. Highest ID assigned is 19 while 14 were confirmed: ByteTrack drops short-lived tracks, and occlusions cause a few ID switches.</a:t>
             </a:r>
             <a:endParaRPr lang="en-US" sz="900" dirty="0"/>
           </a:p>

--- a/Assignment 1/MAS512_assignment1_gr5.pptx
+++ b/Assignment 1/MAS512_assignment1_gr5.pptx
@@ -4,6 +4,9 @@
   <p:sldMasterIdLst>
     <p:sldMasterId id="2147483648" r:id="rId1"/>
   </p:sldMasterIdLst>
+  <p:notesMasterIdLst>
+    <p:notesMasterId r:id="rId15"/>
+  </p:notesMasterIdLst>
   <p:sldIdLst>
     <p:sldId id="256" r:id="rId2"/>
     <p:sldId id="257" r:id="rId3"/>
@@ -19,10 +22,7 @@
     <p:sldId id="267" r:id="rId13"/>
     <p:sldId id="268" r:id="rId14"/>
   </p:sldIdLst>
-  <p:notesMasterIdLst>
-    <p:notesMasterId r:id="rId15"/>
-  </p:notesMasterIdLst>
-  <p:sldSz cx="9144000" cy="5143500"/>
+  <p:sldSz cx="9144000" cy="5143500" type="screen16x9"/>
   <p:notesSz cx="5143500" cy="9144000"/>
   <p:defaultTextStyle>
     <a:lvl1pPr marL="0" algn="l" defTabSz="914400" rtl="0" eaLnBrk="1" latinLnBrk="0" hangingPunct="1">
@@ -116,6 +116,11 @@
       </a:defRPr>
     </a:lvl9pPr>
   </p:defaultTextStyle>
+  <p:extLst>
+    <p:ext uri="{EFAFB233-063F-42B5-8137-9DF3F51BA10A}">
+      <p15:sldGuideLst xmlns:p15="http://schemas.microsoft.com/office/powerpoint/2012/main"/>
+    </p:ext>
+  </p:extLst>
 </p:presentation>
 </file>
 
@@ -141,234 +146,10 @@
           <a:chExt cx="0" cy="0"/>
         </a:xfrm>
       </p:grpSpPr>
-      <p:sp>
-        <p:nvSpPr>
-          <p:cNvPr id="2" name="Header Placeholder 1"/>
-          <p:cNvSpPr>
-            <a:spLocks noGrp="1"/>
-          </p:cNvSpPr>
-          <p:nvPr>
-            <p:ph type="hdr" sz="quarter"/>
-          </p:nvPr>
-        </p:nvSpPr>
-        <p:spPr>
-          <a:xfrm>
-            <a:off x="0" y="0"/>
-            <a:ext cx="2971800" cy="458788"/>
-          </a:xfrm>
-          <a:prstGeom prst="rect">
-            <a:avLst/>
-          </a:prstGeom>
-        </p:spPr>
-        <p:txBody>
-          <a:bodyPr vert="horz" lIns="91440" tIns="45720" rIns="91440" bIns="45720" rtlCol="0"/>
-          <a:lstStyle>
-            <a:lvl1pPr algn="l">
-              <a:defRPr sz="1200"/>
-            </a:lvl1pPr>
-          </a:lstStyle>
-          <a:p>
-            <a:endParaRPr lang="en-US"/>
-          </a:p>
-        </p:txBody>
-      </p:sp>
-      <p:sp>
-        <p:nvSpPr>
-          <p:cNvPr id="3" name="Date Placeholder 2"/>
-          <p:cNvSpPr>
-            <a:spLocks noGrp="1"/>
-          </p:cNvSpPr>
-          <p:nvPr>
-            <p:ph type="dt" idx="1"/>
-          </p:nvPr>
-        </p:nvSpPr>
-        <p:spPr>
-          <a:xfrm>
-            <a:off x="3884613" y="0"/>
-            <a:ext cx="2971800" cy="458788"/>
-          </a:xfrm>
-          <a:prstGeom prst="rect">
-            <a:avLst/>
-          </a:prstGeom>
-        </p:spPr>
-        <p:txBody>
-          <a:bodyPr vert="horz" lIns="91440" tIns="45720" rIns="91440" bIns="45720" rtlCol="0"/>
-          <a:lstStyle>
-            <a:lvl1pPr algn="r">
-              <a:defRPr sz="1200"/>
-            </a:lvl1pPr>
-          </a:lstStyle>
-          <a:p>
-            <a:fld id="{5282F153-3F37-0F45-9E97-73ACFA13230C}" type="datetimeFigureOut">
-              <a:rPr lang="en-US"/>
-              <a:t>7/23/19</a:t>
-            </a:fld>
-            <a:endParaRPr lang="en-US"/>
-          </a:p>
-        </p:txBody>
-      </p:sp>
-      <p:sp>
-        <p:nvSpPr>
-          <p:cNvPr id="4" name="Slide Image Placeholder 3"/>
-          <p:cNvSpPr>
-            <a:spLocks noGrp="1" noRot="1" noChangeAspect="1"/>
-          </p:cNvSpPr>
-          <p:nvPr>
-            <p:ph type="sldImg" idx="2"/>
-          </p:nvPr>
-        </p:nvSpPr>
-        <p:spPr>
-          <a:xfrm>
-            <a:off x="685800" y="1143000"/>
-            <a:ext cx="5486400" cy="3086100"/>
-          </a:xfrm>
-          <a:prstGeom prst="rect">
-            <a:avLst/>
-          </a:prstGeom>
-          <a:noFill/>
-          <a:ln w="12700">
-            <a:solidFill>
-              <a:prstClr val="black"/>
-            </a:solidFill>
-          </a:ln>
-        </p:spPr>
-        <p:txBody>
-          <a:bodyPr vert="horz" lIns="91440" tIns="45720" rIns="91440" bIns="45720" rtlCol="0" anchor="ctr"/>
-          <a:lstStyle/>
-          <a:p>
-            <a:endParaRPr lang="en-US"/>
-          </a:p>
-        </p:txBody>
-      </p:sp>
-      <p:sp>
-        <p:nvSpPr>
-          <p:cNvPr id="5" name="Notes Placeholder 4"/>
-          <p:cNvSpPr>
-            <a:spLocks noGrp="1"/>
-          </p:cNvSpPr>
-          <p:nvPr>
-            <p:ph type="body" sz="quarter" idx="3"/>
-          </p:nvPr>
-        </p:nvSpPr>
-        <p:spPr>
-          <a:xfrm>
-            <a:off x="685800" y="4400550"/>
-            <a:ext cx="5486400" cy="3600450"/>
-          </a:xfrm>
-          <a:prstGeom prst="rect">
-            <a:avLst/>
-          </a:prstGeom>
-        </p:spPr>
-        <p:txBody>
-          <a:bodyPr vert="horz" lIns="91440" tIns="45720" rIns="91440" bIns="45720" rtlCol="0"/>
-          <a:lstStyle/>
-          <a:p>
-            <a:pPr lvl="0"/>
-            <a:r>
-              <a:rPr lang="en-US"/>
-              <a:t>Click to edit Master text styles</a:t>
-            </a:r>
-          </a:p>
-          <a:p>
-            <a:pPr lvl="1"/>
-            <a:r>
-              <a:rPr lang="en-US"/>
-              <a:t>Second level</a:t>
-            </a:r>
-          </a:p>
-          <a:p>
-            <a:pPr lvl="2"/>
-            <a:r>
-              <a:rPr lang="en-US"/>
-              <a:t>Third level</a:t>
-            </a:r>
-          </a:p>
-          <a:p>
-            <a:pPr lvl="3"/>
-            <a:r>
-              <a:rPr lang="en-US"/>
-              <a:t>Fourth level</a:t>
-            </a:r>
-          </a:p>
-          <a:p>
-            <a:pPr lvl="4"/>
-            <a:r>
-              <a:rPr lang="en-US"/>
-              <a:t>Fifth level</a:t>
-            </a:r>
-          </a:p>
-        </p:txBody>
-      </p:sp>
-      <p:sp>
-        <p:nvSpPr>
-          <p:cNvPr id="6" name="Footer Placeholder 5"/>
-          <p:cNvSpPr>
-            <a:spLocks noGrp="1"/>
-          </p:cNvSpPr>
-          <p:nvPr>
-            <p:ph type="ftr" sz="quarter" idx="4"/>
-          </p:nvPr>
-        </p:nvSpPr>
-        <p:spPr>
-          <a:xfrm>
-            <a:off x="0" y="8685213"/>
-            <a:ext cx="2971800" cy="458787"/>
-          </a:xfrm>
-          <a:prstGeom prst="rect">
-            <a:avLst/>
-          </a:prstGeom>
-        </p:spPr>
-        <p:txBody>
-          <a:bodyPr vert="horz" lIns="91440" tIns="45720" rIns="91440" bIns="45720" rtlCol="0" anchor="b"/>
-          <a:lstStyle>
-            <a:lvl1pPr algn="l">
-              <a:defRPr sz="1200"/>
-            </a:lvl1pPr>
-          </a:lstStyle>
-          <a:p>
-            <a:endParaRPr lang="en-US"/>
-          </a:p>
-        </p:txBody>
-      </p:sp>
-      <p:sp>
-        <p:nvSpPr>
-          <p:cNvPr id="7" name="Slide Number Placeholder 6"/>
-          <p:cNvSpPr>
-            <a:spLocks noGrp="1"/>
-          </p:cNvSpPr>
-          <p:nvPr>
-            <p:ph type="sldNum" sz="quarter" idx="5"/>
-          </p:nvPr>
-        </p:nvSpPr>
-        <p:spPr>
-          <a:xfrm>
-            <a:off x="3884613" y="8685213"/>
-            <a:ext cx="2971800" cy="458787"/>
-          </a:xfrm>
-          <a:prstGeom prst="rect">
-            <a:avLst/>
-          </a:prstGeom>
-        </p:spPr>
-        <p:txBody>
-          <a:bodyPr vert="horz" lIns="91440" tIns="45720" rIns="91440" bIns="45720" rtlCol="0" anchor="b"/>
-          <a:lstStyle>
-            <a:lvl1pPr algn="r">
-              <a:defRPr sz="1200"/>
-            </a:lvl1pPr>
-          </a:lstStyle>
-          <a:p>
-            <a:fld id="{CE5E9CC1-C706-0F49-92D6-E571CC5EEA8F}" type="slidenum">
-              <a:rPr lang="en-US"/>
-              <a:t>‹#›</a:t>
-            </a:fld>
-            <a:endParaRPr lang="en-US"/>
-          </a:p>
-        </p:txBody>
-      </p:sp>
     </p:spTree>
     <p:extLst>
       <p:ext uri="{BB962C8B-B14F-4D97-AF65-F5344CB8AC3E}">
-        <p14:creationId xmlns:p14="http://schemas.microsoft.com/office/powerpoint/2010/main" val="1024086991"/>
+        <p14:creationId xmlns:p14="http://schemas.microsoft.com/office/powerpoint/2010/main" val="1711066384"/>
       </p:ext>
     </p:extLst>
   </p:cSld>
@@ -512,10 +293,6 @@
           <a:bodyPr/>
           <a:lstStyle/>
           <a:p>
-            <a:r>
-              <a:rPr lang="en-US" dirty="0"/>
-              <a:t/>
-            </a:r>
             <a:endParaRPr lang="en-US" dirty="0"/>
           </a:p>
         </p:txBody>
@@ -600,10 +377,6 @@
           <a:bodyPr/>
           <a:lstStyle/>
           <a:p>
-            <a:r>
-              <a:rPr lang="en-US" dirty="0"/>
-              <a:t/>
-            </a:r>
             <a:endParaRPr lang="en-US" dirty="0"/>
           </a:p>
         </p:txBody>
@@ -688,10 +461,6 @@
           <a:bodyPr/>
           <a:lstStyle/>
           <a:p>
-            <a:r>
-              <a:rPr lang="en-US" dirty="0"/>
-              <a:t/>
-            </a:r>
             <a:endParaRPr lang="en-US" dirty="0"/>
           </a:p>
         </p:txBody>
@@ -776,10 +545,6 @@
           <a:bodyPr/>
           <a:lstStyle/>
           <a:p>
-            <a:r>
-              <a:rPr lang="en-US" dirty="0"/>
-              <a:t/>
-            </a:r>
             <a:endParaRPr lang="en-US" dirty="0"/>
           </a:p>
         </p:txBody>
@@ -864,10 +629,6 @@
           <a:bodyPr/>
           <a:lstStyle/>
           <a:p>
-            <a:r>
-              <a:rPr lang="en-US" dirty="0"/>
-              <a:t/>
-            </a:r>
             <a:endParaRPr lang="en-US" dirty="0"/>
           </a:p>
         </p:txBody>
@@ -952,10 +713,6 @@
           <a:bodyPr/>
           <a:lstStyle/>
           <a:p>
-            <a:r>
-              <a:rPr lang="en-US" dirty="0"/>
-              <a:t/>
-            </a:r>
             <a:endParaRPr lang="en-US" dirty="0"/>
           </a:p>
         </p:txBody>
@@ -1040,10 +797,6 @@
           <a:bodyPr/>
           <a:lstStyle/>
           <a:p>
-            <a:r>
-              <a:rPr lang="en-US" dirty="0"/>
-              <a:t/>
-            </a:r>
             <a:endParaRPr lang="en-US" dirty="0"/>
           </a:p>
         </p:txBody>
@@ -1128,10 +881,6 @@
           <a:bodyPr/>
           <a:lstStyle/>
           <a:p>
-            <a:r>
-              <a:rPr lang="en-US" dirty="0"/>
-              <a:t/>
-            </a:r>
             <a:endParaRPr lang="en-US" dirty="0"/>
           </a:p>
         </p:txBody>
@@ -1216,10 +965,6 @@
           <a:bodyPr/>
           <a:lstStyle/>
           <a:p>
-            <a:r>
-              <a:rPr lang="en-US" dirty="0"/>
-              <a:t/>
-            </a:r>
             <a:endParaRPr lang="en-US" dirty="0"/>
           </a:p>
         </p:txBody>
@@ -1304,10 +1049,6 @@
           <a:bodyPr/>
           <a:lstStyle/>
           <a:p>
-            <a:r>
-              <a:rPr lang="en-US" dirty="0"/>
-              <a:t/>
-            </a:r>
             <a:endParaRPr lang="en-US" dirty="0"/>
           </a:p>
         </p:txBody>
@@ -1392,10 +1133,6 @@
           <a:bodyPr/>
           <a:lstStyle/>
           <a:p>
-            <a:r>
-              <a:rPr lang="en-US" dirty="0"/>
-              <a:t/>
-            </a:r>
             <a:endParaRPr lang="en-US" dirty="0"/>
           </a:p>
         </p:txBody>
@@ -1480,10 +1217,6 @@
           <a:bodyPr/>
           <a:lstStyle/>
           <a:p>
-            <a:r>
-              <a:rPr lang="en-US" dirty="0"/>
-              <a:t/>
-            </a:r>
             <a:endParaRPr lang="en-US" dirty="0"/>
           </a:p>
         </p:txBody>
@@ -1568,10 +1301,6 @@
           <a:bodyPr/>
           <a:lstStyle/>
           <a:p>
-            <a:r>
-              <a:rPr lang="en-US" dirty="0"/>
-              <a:t/>
-            </a:r>
             <a:endParaRPr lang="en-US" dirty="0"/>
           </a:p>
         </p:txBody>
@@ -1645,6 +1374,11 @@
 <file path=ppt/slideMasters/slideMaster1.xml><?xml version="1.0" encoding="utf-8"?>
 <p:sldMaster xmlns:a="http://schemas.openxmlformats.org/drawingml/2006/main" xmlns:r="http://schemas.openxmlformats.org/officeDocument/2006/relationships" xmlns:p="http://schemas.openxmlformats.org/presentationml/2006/main">
   <p:cSld>
+    <p:bg>
+      <p:bgRef idx="1001">
+        <a:schemeClr val="bg1"/>
+      </p:bgRef>
+    </p:bg>
     <p:spTree>
       <p:nvGrpSpPr>
         <p:cNvPr id="1" name=""/>
@@ -1927,6 +1661,7 @@
         <a:solidFill>
           <a:srgbClr val="23262F"/>
         </a:solidFill>
+        <a:effectLst/>
       </p:bgPr>
     </p:bg>
     <p:spTree>
@@ -1964,11 +1699,11 @@
           <a:bodyPr wrap="square" lIns="0" tIns="0" rIns="0" bIns="0" rtlCol="0" anchor="ctr"/>
           <a:lstStyle/>
           <a:p>
-            <a:pPr indent="0" marL="0">
-              <a:buNone/>
-            </a:pPr>
-            <a:r>
-              <a:rPr lang="en-US" sz="1600" b="1" spc="200" kern="0" dirty="0">
+            <a:pPr marL="0" indent="0">
+              <a:buNone/>
+            </a:pPr>
+            <a:r>
+              <a:rPr lang="en-US" sz="1600" b="1" kern="0" spc="200" dirty="0">
                 <a:solidFill>
                   <a:srgbClr val="F2A33C"/>
                 </a:solidFill>
@@ -2003,7 +1738,7 @@
           <a:bodyPr wrap="square" lIns="0" tIns="0" rIns="0" bIns="0" rtlCol="0" anchor="ctr"/>
           <a:lstStyle/>
           <a:p>
-            <a:pPr indent="0" marL="0">
+            <a:pPr marL="0" indent="0">
               <a:buNone/>
             </a:pPr>
             <a:r>
@@ -2020,7 +1755,7 @@
             <a:endParaRPr lang="en-US" sz="3800" dirty="0"/>
           </a:p>
           <a:p>
-            <a:pPr indent="0" marL="0">
+            <a:pPr marL="0" indent="0">
               <a:buNone/>
             </a:pPr>
             <a:r>
@@ -2059,7 +1794,7 @@
           <a:bodyPr wrap="square" lIns="0" tIns="0" rIns="0" bIns="0" rtlCol="0" anchor="ctr"/>
           <a:lstStyle/>
           <a:p>
-            <a:pPr indent="0" marL="0">
+            <a:pPr marL="0" indent="0">
               <a:buNone/>
             </a:pPr>
             <a:r>
@@ -2085,8 +1820,8 @@
         </p:nvSpPr>
         <p:spPr>
           <a:xfrm>
-            <a:off x="640080" y="3749040"/>
-            <a:ext cx="4572000" cy="548640"/>
+            <a:off x="640080" y="4123942"/>
+            <a:ext cx="4572000" cy="347473"/>
           </a:xfrm>
           <a:prstGeom prst="roundRect">
             <a:avLst>
@@ -2100,63 +1835,18 @@
             <a:solidFill>
               <a:srgbClr val="8A93A6"/>
             </a:solidFill>
-            <a:prstDash val="dash"/>
+            <a:prstDash val="solid"/>
           </a:ln>
         </p:spPr>
-      </p:sp>
-      <p:sp>
-        <p:nvSpPr>
-          <p:cNvPr id="6" name="Text 4"/>
-          <p:cNvSpPr txBox="1"/>
-          <p:nvPr/>
-        </p:nvSpPr>
-        <p:spPr>
-          <a:xfrm>
-            <a:off x="777240" y="3749040"/>
-            <a:ext cx="4297680" cy="548640"/>
-          </a:xfrm>
-          <a:prstGeom prst="rect">
-            <a:avLst/>
-          </a:prstGeom>
-          <a:noFill/>
-          <a:ln/>
-        </p:spPr>
-        <p:txBody>
-          <a:bodyPr wrap="square" lIns="0" tIns="0" rIns="0" bIns="0" rtlCol="0" anchor="ctr"/>
-          <a:lstStyle/>
-          <a:p>
-            <a:pPr algn="ctr" indent="0" marL="0">
-              <a:buNone/>
-            </a:pPr>
-            <a:r>
-              <a:rPr lang="en-US" sz="1100" b="1" dirty="0">
-                <a:solidFill>
-                  <a:srgbClr val="F2A33C"/>
-                </a:solidFill>
-                <a:latin typeface="Calibri" pitchFamily="34" charset="0"/>
-                <a:ea typeface="Calibri" pitchFamily="34" charset="-122"/>
-                <a:cs typeface="Calibri" pitchFamily="34" charset="-120"/>
-              </a:rPr>
-              <a:t>INSERT</a:t>
-            </a:r>
-            <a:endParaRPr lang="en-US" sz="1100" dirty="0"/>
-          </a:p>
-          <a:p>
-            <a:pPr algn="ctr" indent="0" marL="0">
-              <a:buNone/>
-            </a:pPr>
-            <a:r>
-              <a:rPr lang="en-US" sz="1100" dirty="0">
-                <a:solidFill>
-                  <a:srgbClr val="8A93A6"/>
-                </a:solidFill>
-                <a:latin typeface="Calibri" pitchFamily="34" charset="0"/>
-                <a:ea typeface="Calibri" pitchFamily="34" charset="-122"/>
-                <a:cs typeface="Calibri" pitchFamily="34" charset="-120"/>
-              </a:rPr>
-              <a:t>group member names</a:t>
-            </a:r>
-            <a:endParaRPr lang="en-US" sz="1100" dirty="0"/>
+        <p:txBody>
+          <a:bodyPr/>
+          <a:lstStyle/>
+          <a:p>
+            <a:pPr algn="ctr"/>
+            <a:r>
+              <a:rPr lang="en-GB" sz="1200" dirty="0"/>
+              <a:t>Are Gundersen, Sebastian Steenfeldt-Gjersøe</a:t>
+            </a:r>
           </a:p>
         </p:txBody>
       </p:sp>
@@ -2184,6 +1874,13 @@
             <a:prstDash val="solid"/>
           </a:ln>
         </p:spPr>
+        <p:txBody>
+          <a:bodyPr/>
+          <a:lstStyle/>
+          <a:p>
+            <a:endParaRPr lang="en-GB"/>
+          </a:p>
+        </p:txBody>
       </p:sp>
       <p:sp>
         <p:nvSpPr>
@@ -2206,7 +1903,7 @@
           <a:bodyPr wrap="square" lIns="0" tIns="0" rIns="0" bIns="0" rtlCol="0" anchor="ctr"/>
           <a:lstStyle/>
           <a:p>
-            <a:pPr algn="ctr" indent="0" marL="0">
+            <a:pPr marL="0" indent="0" algn="ctr">
               <a:buNone/>
             </a:pPr>
             <a:r>
@@ -2248,6 +1945,13 @@
             <a:prstDash val="solid"/>
           </a:ln>
         </p:spPr>
+        <p:txBody>
+          <a:bodyPr/>
+          <a:lstStyle/>
+          <a:p>
+            <a:endParaRPr lang="en-GB"/>
+          </a:p>
+        </p:txBody>
       </p:sp>
       <p:sp>
         <p:nvSpPr>
@@ -2270,7 +1974,7 @@
           <a:bodyPr wrap="square" lIns="0" tIns="0" rIns="0" bIns="0" rtlCol="0" anchor="ctr"/>
           <a:lstStyle/>
           <a:p>
-            <a:pPr algn="ctr" indent="0" marL="0">
+            <a:pPr marL="0" indent="0" algn="ctr">
               <a:buNone/>
             </a:pPr>
             <a:r>
@@ -2312,6 +2016,13 @@
             <a:prstDash val="solid"/>
           </a:ln>
         </p:spPr>
+        <p:txBody>
+          <a:bodyPr/>
+          <a:lstStyle/>
+          <a:p>
+            <a:endParaRPr lang="en-GB"/>
+          </a:p>
+        </p:txBody>
       </p:sp>
       <p:sp>
         <p:nvSpPr>
@@ -2334,7 +2045,7 @@
           <a:bodyPr wrap="square" lIns="0" tIns="0" rIns="0" bIns="0" rtlCol="0" anchor="ctr"/>
           <a:lstStyle/>
           <a:p>
-            <a:pPr algn="ctr" indent="0" marL="0">
+            <a:pPr marL="0" indent="0" algn="ctr">
               <a:buNone/>
             </a:pPr>
             <a:r>
@@ -2376,6 +2087,13 @@
             <a:prstDash val="solid"/>
           </a:ln>
         </p:spPr>
+        <p:txBody>
+          <a:bodyPr/>
+          <a:lstStyle/>
+          <a:p>
+            <a:endParaRPr lang="en-GB"/>
+          </a:p>
+        </p:txBody>
       </p:sp>
       <p:sp>
         <p:nvSpPr>
@@ -2398,7 +2116,7 @@
           <a:bodyPr wrap="square" lIns="0" tIns="0" rIns="0" bIns="0" rtlCol="0" anchor="ctr"/>
           <a:lstStyle/>
           <a:p>
-            <a:pPr algn="ctr" indent="0" marL="0">
+            <a:pPr marL="0" indent="0" algn="ctr">
               <a:buNone/>
             </a:pPr>
             <a:r>
@@ -2440,6 +2158,13 @@
             <a:prstDash val="solid"/>
           </a:ln>
         </p:spPr>
+        <p:txBody>
+          <a:bodyPr/>
+          <a:lstStyle/>
+          <a:p>
+            <a:endParaRPr lang="en-GB"/>
+          </a:p>
+        </p:txBody>
       </p:sp>
       <p:sp>
         <p:nvSpPr>
@@ -2462,7 +2187,7 @@
           <a:bodyPr wrap="square" lIns="0" tIns="0" rIns="0" bIns="0" rtlCol="0" anchor="ctr"/>
           <a:lstStyle/>
           <a:p>
-            <a:pPr algn="ctr" indent="0" marL="0">
+            <a:pPr marL="0" indent="0" algn="ctr">
               <a:buNone/>
             </a:pPr>
             <a:r>
@@ -2504,6 +2229,13 @@
             <a:prstDash val="solid"/>
           </a:ln>
         </p:spPr>
+        <p:txBody>
+          <a:bodyPr/>
+          <a:lstStyle/>
+          <a:p>
+            <a:endParaRPr lang="en-GB"/>
+          </a:p>
+        </p:txBody>
       </p:sp>
       <p:sp>
         <p:nvSpPr>
@@ -2526,7 +2258,7 @@
           <a:bodyPr wrap="square" lIns="0" tIns="0" rIns="0" bIns="0" rtlCol="0" anchor="ctr"/>
           <a:lstStyle/>
           <a:p>
-            <a:pPr algn="ctr" indent="0" marL="0">
+            <a:pPr marL="0" indent="0" algn="ctr">
               <a:buNone/>
             </a:pPr>
             <a:r>
@@ -2560,6 +2292,7 @@
         <a:solidFill>
           <a:srgbClr val="F6F6F8"/>
         </a:solidFill>
+        <a:effectLst/>
       </p:bgPr>
     </p:bg>
     <p:spTree>
@@ -2600,6 +2333,13 @@
             <a:prstDash val="solid"/>
           </a:ln>
         </p:spPr>
+        <p:txBody>
+          <a:bodyPr/>
+          <a:lstStyle/>
+          <a:p>
+            <a:endParaRPr lang="en-GB"/>
+          </a:p>
+        </p:txBody>
       </p:sp>
       <p:sp>
         <p:nvSpPr>
@@ -2622,7 +2362,7 @@
           <a:bodyPr wrap="square" lIns="0" tIns="0" rIns="0" bIns="0" rtlCol="0" anchor="ctr"/>
           <a:lstStyle/>
           <a:p>
-            <a:pPr algn="ctr" indent="0" marL="0">
+            <a:pPr marL="0" indent="0" algn="ctr">
               <a:buNone/>
             </a:pPr>
             <a:r>
@@ -2661,7 +2401,7 @@
           <a:bodyPr wrap="square" lIns="0" tIns="0" rIns="0" bIns="0" rtlCol="0" anchor="ctr"/>
           <a:lstStyle/>
           <a:p>
-            <a:pPr indent="0" marL="0">
+            <a:pPr marL="0" indent="0">
               <a:buNone/>
             </a:pPr>
             <a:r>
@@ -2705,13 +2445,20 @@
             <a:prstDash val="solid"/>
           </a:ln>
           <a:effectLst>
-            <a:outerShdw sx="100000" sy="100000" kx="0" ky="0" algn="bl" rotWithShape="0" blurRad="76200" dist="25400" dir="5400000">
+            <a:outerShdw blurRad="76200" dist="25400" dir="5400000" algn="bl" rotWithShape="0">
               <a:srgbClr val="000000">
                 <a:alpha val="8000"/>
               </a:srgbClr>
             </a:outerShdw>
           </a:effectLst>
         </p:spPr>
+        <p:txBody>
+          <a:bodyPr/>
+          <a:lstStyle/>
+          <a:p>
+            <a:endParaRPr lang="en-GB"/>
+          </a:p>
+        </p:txBody>
       </p:sp>
       <p:sp>
         <p:nvSpPr>
@@ -2734,7 +2481,7 @@
           <a:bodyPr wrap="square" lIns="0" tIns="0" rIns="0" bIns="0" rtlCol="0" anchor="ctr"/>
           <a:lstStyle/>
           <a:p>
-            <a:pPr indent="0" marL="0">
+            <a:pPr marL="0" indent="0">
               <a:buNone/>
             </a:pPr>
             <a:r>
@@ -2884,13 +2631,20 @@
             <a:prstDash val="solid"/>
           </a:ln>
           <a:effectLst>
-            <a:outerShdw sx="100000" sy="100000" kx="0" ky="0" algn="bl" rotWithShape="0" blurRad="76200" dist="25400" dir="5400000">
+            <a:outerShdw blurRad="76200" dist="25400" dir="5400000" algn="bl" rotWithShape="0">
               <a:srgbClr val="000000">
                 <a:alpha val="8000"/>
               </a:srgbClr>
             </a:outerShdw>
           </a:effectLst>
         </p:spPr>
+        <p:txBody>
+          <a:bodyPr/>
+          <a:lstStyle/>
+          <a:p>
+            <a:endParaRPr lang="en-GB"/>
+          </a:p>
+        </p:txBody>
       </p:sp>
       <p:sp>
         <p:nvSpPr>
@@ -2913,7 +2667,7 @@
           <a:bodyPr wrap="square" lIns="0" tIns="0" rIns="0" bIns="0" rtlCol="0" anchor="ctr"/>
           <a:lstStyle/>
           <a:p>
-            <a:pPr indent="0" marL="0">
+            <a:pPr marL="0" indent="0">
               <a:buNone/>
             </a:pPr>
             <a:r>
@@ -3063,6 +2817,13 @@
             <a:prstDash val="dash"/>
           </a:ln>
         </p:spPr>
+        <p:txBody>
+          <a:bodyPr/>
+          <a:lstStyle/>
+          <a:p>
+            <a:endParaRPr lang="en-GB"/>
+          </a:p>
+        </p:txBody>
       </p:sp>
       <p:sp>
         <p:nvSpPr>
@@ -3085,7 +2846,7 @@
           <a:bodyPr wrap="square" lIns="0" tIns="0" rIns="0" bIns="0" rtlCol="0" anchor="ctr"/>
           <a:lstStyle/>
           <a:p>
-            <a:pPr algn="ctr" indent="0" marL="0">
+            <a:pPr marL="0" indent="0" algn="ctr">
               <a:buNone/>
             </a:pPr>
             <a:r>
@@ -3102,7 +2863,7 @@
             <a:endParaRPr lang="en-US" sz="1100" dirty="0"/>
           </a:p>
           <a:p>
-            <a:pPr algn="ctr" indent="0" marL="0">
+            <a:pPr marL="0" indent="0" algn="ctr">
               <a:buNone/>
             </a:pPr>
             <a:r>
@@ -3146,6 +2907,13 @@
             <a:prstDash val="dash"/>
           </a:ln>
         </p:spPr>
+        <p:txBody>
+          <a:bodyPr/>
+          <a:lstStyle/>
+          <a:p>
+            <a:endParaRPr lang="en-GB"/>
+          </a:p>
+        </p:txBody>
       </p:sp>
       <p:sp>
         <p:nvSpPr>
@@ -3168,7 +2936,7 @@
           <a:bodyPr wrap="square" lIns="0" tIns="0" rIns="0" bIns="0" rtlCol="0" anchor="ctr"/>
           <a:lstStyle/>
           <a:p>
-            <a:pPr algn="ctr" indent="0" marL="0">
+            <a:pPr marL="0" indent="0" algn="ctr">
               <a:buNone/>
             </a:pPr>
             <a:r>
@@ -3185,7 +2953,7 @@
             <a:endParaRPr lang="en-US" sz="1100" dirty="0"/>
           </a:p>
           <a:p>
-            <a:pPr algn="ctr" indent="0" marL="0">
+            <a:pPr marL="0" indent="0" algn="ctr">
               <a:buNone/>
             </a:pPr>
             <a:r>
@@ -3224,7 +2992,7 @@
           <a:bodyPr wrap="square" lIns="0" tIns="0" rIns="0" bIns="0" rtlCol="0" anchor="ctr"/>
           <a:lstStyle/>
           <a:p>
-            <a:pPr indent="0" marL="0">
+            <a:pPr marL="0" indent="0">
               <a:buNone/>
             </a:pPr>
             <a:r>
@@ -3258,6 +3026,7 @@
         <a:solidFill>
           <a:srgbClr val="F6F6F8"/>
         </a:solidFill>
+        <a:effectLst/>
       </p:bgPr>
     </p:bg>
     <p:spTree>
@@ -3298,6 +3067,13 @@
             <a:prstDash val="solid"/>
           </a:ln>
         </p:spPr>
+        <p:txBody>
+          <a:bodyPr/>
+          <a:lstStyle/>
+          <a:p>
+            <a:endParaRPr lang="en-GB"/>
+          </a:p>
+        </p:txBody>
       </p:sp>
       <p:sp>
         <p:nvSpPr>
@@ -3320,7 +3096,7 @@
           <a:bodyPr wrap="square" lIns="0" tIns="0" rIns="0" bIns="0" rtlCol="0" anchor="ctr"/>
           <a:lstStyle/>
           <a:p>
-            <a:pPr algn="ctr" indent="0" marL="0">
+            <a:pPr marL="0" indent="0" algn="ctr">
               <a:buNone/>
             </a:pPr>
             <a:r>
@@ -3359,7 +3135,7 @@
           <a:bodyPr wrap="square" lIns="0" tIns="0" rIns="0" bIns="0" rtlCol="0" anchor="ctr"/>
           <a:lstStyle/>
           <a:p>
-            <a:pPr indent="0" marL="0">
+            <a:pPr marL="0" indent="0">
               <a:buNone/>
             </a:pPr>
             <a:r>
@@ -3403,13 +3179,20 @@
             <a:prstDash val="solid"/>
           </a:ln>
           <a:effectLst>
-            <a:outerShdw sx="100000" sy="100000" kx="0" ky="0" algn="bl" rotWithShape="0" blurRad="76200" dist="25400" dir="5400000">
+            <a:outerShdw blurRad="76200" dist="25400" dir="5400000" algn="bl" rotWithShape="0">
               <a:srgbClr val="000000">
                 <a:alpha val="8000"/>
               </a:srgbClr>
             </a:outerShdw>
           </a:effectLst>
         </p:spPr>
+        <p:txBody>
+          <a:bodyPr/>
+          <a:lstStyle/>
+          <a:p>
+            <a:endParaRPr lang="en-GB"/>
+          </a:p>
+        </p:txBody>
       </p:sp>
       <p:sp>
         <p:nvSpPr>
@@ -3432,7 +3215,7 @@
           <a:bodyPr wrap="square" lIns="0" tIns="0" rIns="0" bIns="0" rtlCol="0" anchor="ctr"/>
           <a:lstStyle/>
           <a:p>
-            <a:pPr indent="0" marL="0">
+            <a:pPr marL="0" indent="0">
               <a:buNone/>
             </a:pPr>
             <a:r>
@@ -3540,13 +3323,20 @@
             <a:prstDash val="solid"/>
           </a:ln>
           <a:effectLst>
-            <a:outerShdw sx="100000" sy="100000" kx="0" ky="0" algn="bl" rotWithShape="0" blurRad="76200" dist="25400" dir="5400000">
+            <a:outerShdw blurRad="76200" dist="25400" dir="5400000" algn="bl" rotWithShape="0">
               <a:srgbClr val="000000">
                 <a:alpha val="8000"/>
               </a:srgbClr>
             </a:outerShdw>
           </a:effectLst>
         </p:spPr>
+        <p:txBody>
+          <a:bodyPr/>
+          <a:lstStyle/>
+          <a:p>
+            <a:endParaRPr lang="en-GB"/>
+          </a:p>
+        </p:txBody>
       </p:sp>
       <p:sp>
         <p:nvSpPr>
@@ -3569,7 +3359,7 @@
           <a:bodyPr wrap="square" lIns="0" tIns="0" rIns="0" bIns="0" rtlCol="0" anchor="ctr"/>
           <a:lstStyle/>
           <a:p>
-            <a:pPr indent="0" marL="0">
+            <a:pPr marL="0" indent="0">
               <a:buNone/>
             </a:pPr>
             <a:r>
@@ -3677,13 +3467,20 @@
             <a:prstDash val="solid"/>
           </a:ln>
           <a:effectLst>
-            <a:outerShdw sx="100000" sy="100000" kx="0" ky="0" algn="bl" rotWithShape="0" blurRad="76200" dist="25400" dir="5400000">
+            <a:outerShdw blurRad="76200" dist="25400" dir="5400000" algn="bl" rotWithShape="0">
               <a:srgbClr val="000000">
                 <a:alpha val="8000"/>
               </a:srgbClr>
             </a:outerShdw>
           </a:effectLst>
         </p:spPr>
+        <p:txBody>
+          <a:bodyPr/>
+          <a:lstStyle/>
+          <a:p>
+            <a:endParaRPr lang="en-GB"/>
+          </a:p>
+        </p:txBody>
       </p:sp>
       <p:sp>
         <p:nvSpPr>
@@ -3706,7 +3503,7 @@
           <a:bodyPr wrap="square" lIns="0" tIns="0" rIns="0" bIns="0" rtlCol="0" anchor="ctr"/>
           <a:lstStyle/>
           <a:p>
-            <a:pPr indent="0" marL="0">
+            <a:pPr marL="0" indent="0">
               <a:buNone/>
             </a:pPr>
             <a:r>
@@ -3809,7 +3606,7 @@
           <a:bodyPr wrap="square" lIns="0" tIns="0" rIns="0" bIns="0" rtlCol="0" anchor="ctr"/>
           <a:lstStyle/>
           <a:p>
-            <a:pPr indent="0" marL="0">
+            <a:pPr marL="0" indent="0">
               <a:buNone/>
             </a:pPr>
             <a:r>
@@ -3853,6 +3650,13 @@
             <a:prstDash val="dash"/>
           </a:ln>
         </p:spPr>
+        <p:txBody>
+          <a:bodyPr/>
+          <a:lstStyle/>
+          <a:p>
+            <a:endParaRPr lang="en-GB"/>
+          </a:p>
+        </p:txBody>
       </p:sp>
       <p:sp>
         <p:nvSpPr>
@@ -3875,7 +3679,7 @@
           <a:bodyPr wrap="square" lIns="0" tIns="0" rIns="0" bIns="0" rtlCol="0" anchor="ctr"/>
           <a:lstStyle/>
           <a:p>
-            <a:pPr algn="ctr" indent="0" marL="0">
+            <a:pPr marL="0" indent="0" algn="ctr">
               <a:buNone/>
             </a:pPr>
             <a:r>
@@ -3892,7 +3696,7 @@
             <a:endParaRPr lang="en-US" sz="1100" dirty="0"/>
           </a:p>
           <a:p>
-            <a:pPr algn="ctr" indent="0" marL="0">
+            <a:pPr marL="0" indent="0" algn="ctr">
               <a:buNone/>
             </a:pPr>
             <a:r>
@@ -3931,7 +3735,7 @@
           <a:bodyPr wrap="square" lIns="0" tIns="0" rIns="0" bIns="0" rtlCol="0" anchor="ctr"/>
           <a:lstStyle/>
           <a:p>
-            <a:pPr indent="0" marL="0">
+            <a:pPr marL="0" indent="0">
               <a:buNone/>
             </a:pPr>
             <a:r>
@@ -3965,6 +3769,7 @@
         <a:solidFill>
           <a:srgbClr val="F6F6F8"/>
         </a:solidFill>
+        <a:effectLst/>
       </p:bgPr>
     </p:bg>
     <p:spTree>
@@ -4005,6 +3810,13 @@
             <a:prstDash val="solid"/>
           </a:ln>
         </p:spPr>
+        <p:txBody>
+          <a:bodyPr/>
+          <a:lstStyle/>
+          <a:p>
+            <a:endParaRPr lang="en-GB"/>
+          </a:p>
+        </p:txBody>
       </p:sp>
       <p:sp>
         <p:nvSpPr>
@@ -4027,7 +3839,7 @@
           <a:bodyPr wrap="square" lIns="0" tIns="0" rIns="0" bIns="0" rtlCol="0" anchor="ctr"/>
           <a:lstStyle/>
           <a:p>
-            <a:pPr algn="ctr" indent="0" marL="0">
+            <a:pPr marL="0" indent="0" algn="ctr">
               <a:buNone/>
             </a:pPr>
             <a:r>
@@ -4066,7 +3878,7 @@
           <a:bodyPr wrap="square" lIns="0" tIns="0" rIns="0" bIns="0" rtlCol="0" anchor="ctr"/>
           <a:lstStyle/>
           <a:p>
-            <a:pPr indent="0" marL="0">
+            <a:pPr marL="0" indent="0">
               <a:buNone/>
             </a:pPr>
             <a:r>
@@ -4110,13 +3922,20 @@
             <a:prstDash val="solid"/>
           </a:ln>
           <a:effectLst>
-            <a:outerShdw sx="100000" sy="100000" kx="0" ky="0" algn="bl" rotWithShape="0" blurRad="76200" dist="25400" dir="5400000">
+            <a:outerShdw blurRad="76200" dist="25400" dir="5400000" algn="bl" rotWithShape="0">
               <a:srgbClr val="000000">
                 <a:alpha val="8000"/>
               </a:srgbClr>
             </a:outerShdw>
           </a:effectLst>
         </p:spPr>
+        <p:txBody>
+          <a:bodyPr/>
+          <a:lstStyle/>
+          <a:p>
+            <a:endParaRPr lang="en-GB"/>
+          </a:p>
+        </p:txBody>
       </p:sp>
       <p:sp>
         <p:nvSpPr>
@@ -4139,7 +3958,7 @@
           <a:bodyPr wrap="square" lIns="0" tIns="0" rIns="0" bIns="0" rtlCol="0" anchor="ctr"/>
           <a:lstStyle/>
           <a:p>
-            <a:pPr indent="0" marL="0">
+            <a:pPr marL="0" indent="0">
               <a:buNone/>
             </a:pPr>
             <a:r>
@@ -4289,6 +4108,13 @@
             <a:prstDash val="dash"/>
           </a:ln>
         </p:spPr>
+        <p:txBody>
+          <a:bodyPr/>
+          <a:lstStyle/>
+          <a:p>
+            <a:endParaRPr lang="en-GB"/>
+          </a:p>
+        </p:txBody>
       </p:sp>
       <p:sp>
         <p:nvSpPr>
@@ -4311,7 +4137,7 @@
           <a:bodyPr wrap="square" lIns="0" tIns="0" rIns="0" bIns="0" rtlCol="0" anchor="ctr"/>
           <a:lstStyle/>
           <a:p>
-            <a:pPr algn="ctr" indent="0" marL="0">
+            <a:pPr marL="0" indent="0" algn="ctr">
               <a:buNone/>
             </a:pPr>
             <a:r>
@@ -4328,7 +4154,7 @@
             <a:endParaRPr lang="en-US" sz="1100" dirty="0"/>
           </a:p>
           <a:p>
-            <a:pPr algn="ctr" indent="0" marL="0">
+            <a:pPr marL="0" indent="0" algn="ctr">
               <a:buNone/>
             </a:pPr>
             <a:r>
@@ -4372,6 +4198,13 @@
             <a:prstDash val="dash"/>
           </a:ln>
         </p:spPr>
+        <p:txBody>
+          <a:bodyPr/>
+          <a:lstStyle/>
+          <a:p>
+            <a:endParaRPr lang="en-GB"/>
+          </a:p>
+        </p:txBody>
       </p:sp>
       <p:sp>
         <p:nvSpPr>
@@ -4394,7 +4227,7 @@
           <a:bodyPr wrap="square" lIns="0" tIns="0" rIns="0" bIns="0" rtlCol="0" anchor="ctr"/>
           <a:lstStyle/>
           <a:p>
-            <a:pPr algn="ctr" indent="0" marL="0">
+            <a:pPr marL="0" indent="0" algn="ctr">
               <a:buNone/>
             </a:pPr>
             <a:r>
@@ -4411,7 +4244,7 @@
             <a:endParaRPr lang="en-US" sz="1100" dirty="0"/>
           </a:p>
           <a:p>
-            <a:pPr algn="ctr" indent="0" marL="0">
+            <a:pPr marL="0" indent="0" algn="ctr">
               <a:buNone/>
             </a:pPr>
             <a:r>
@@ -4450,7 +4283,7 @@
           <a:bodyPr wrap="square" lIns="0" tIns="0" rIns="0" bIns="0" rtlCol="0" anchor="ctr"/>
           <a:lstStyle/>
           <a:p>
-            <a:pPr indent="0" marL="0">
+            <a:pPr marL="0" indent="0">
               <a:buNone/>
             </a:pPr>
             <a:r>
@@ -4484,6 +4317,7 @@
         <a:solidFill>
           <a:srgbClr val="23262F"/>
         </a:solidFill>
+        <a:effectLst/>
       </p:bgPr>
     </p:bg>
     <p:spTree>
@@ -4521,7 +4355,7 @@
           <a:bodyPr wrap="square" lIns="0" tIns="0" rIns="0" bIns="0" rtlCol="0" anchor="ctr"/>
           <a:lstStyle/>
           <a:p>
-            <a:pPr indent="0" marL="0">
+            <a:pPr marL="0" indent="0">
               <a:buNone/>
             </a:pPr>
             <a:r>
@@ -4563,6 +4397,13 @@
             <a:prstDash val="solid"/>
           </a:ln>
         </p:spPr>
+        <p:txBody>
+          <a:bodyPr/>
+          <a:lstStyle/>
+          <a:p>
+            <a:endParaRPr lang="en-GB"/>
+          </a:p>
+        </p:txBody>
       </p:sp>
       <p:sp>
         <p:nvSpPr>
@@ -4585,7 +4426,7 @@
           <a:bodyPr wrap="square" lIns="0" tIns="0" rIns="0" bIns="0" rtlCol="0" anchor="ctr"/>
           <a:lstStyle/>
           <a:p>
-            <a:pPr algn="ctr" indent="0" marL="0">
+            <a:pPr marL="0" indent="0" algn="ctr">
               <a:buNone/>
             </a:pPr>
             <a:r>
@@ -4624,7 +4465,7 @@
           <a:bodyPr wrap="square" lIns="0" tIns="0" rIns="0" bIns="0" rtlCol="0" anchor="ctr"/>
           <a:lstStyle/>
           <a:p>
-            <a:pPr indent="0" marL="0">
+            <a:pPr marL="0" indent="0">
               <a:buNone/>
             </a:pPr>
             <a:r>
@@ -4666,6 +4507,13 @@
             <a:prstDash val="solid"/>
           </a:ln>
         </p:spPr>
+        <p:txBody>
+          <a:bodyPr/>
+          <a:lstStyle/>
+          <a:p>
+            <a:endParaRPr lang="en-GB"/>
+          </a:p>
+        </p:txBody>
       </p:sp>
       <p:sp>
         <p:nvSpPr>
@@ -4688,7 +4536,7 @@
           <a:bodyPr wrap="square" lIns="0" tIns="0" rIns="0" bIns="0" rtlCol="0" anchor="ctr"/>
           <a:lstStyle/>
           <a:p>
-            <a:pPr algn="ctr" indent="0" marL="0">
+            <a:pPr marL="0" indent="0" algn="ctr">
               <a:buNone/>
             </a:pPr>
             <a:r>
@@ -4727,7 +4575,7 @@
           <a:bodyPr wrap="square" lIns="0" tIns="0" rIns="0" bIns="0" rtlCol="0" anchor="ctr"/>
           <a:lstStyle/>
           <a:p>
-            <a:pPr indent="0" marL="0">
+            <a:pPr marL="0" indent="0">
               <a:buNone/>
             </a:pPr>
             <a:r>
@@ -4769,6 +4617,13 @@
             <a:prstDash val="solid"/>
           </a:ln>
         </p:spPr>
+        <p:txBody>
+          <a:bodyPr/>
+          <a:lstStyle/>
+          <a:p>
+            <a:endParaRPr lang="en-GB"/>
+          </a:p>
+        </p:txBody>
       </p:sp>
       <p:sp>
         <p:nvSpPr>
@@ -4791,7 +4646,7 @@
           <a:bodyPr wrap="square" lIns="0" tIns="0" rIns="0" bIns="0" rtlCol="0" anchor="ctr"/>
           <a:lstStyle/>
           <a:p>
-            <a:pPr algn="ctr" indent="0" marL="0">
+            <a:pPr marL="0" indent="0" algn="ctr">
               <a:buNone/>
             </a:pPr>
             <a:r>
@@ -4830,7 +4685,7 @@
           <a:bodyPr wrap="square" lIns="0" tIns="0" rIns="0" bIns="0" rtlCol="0" anchor="ctr"/>
           <a:lstStyle/>
           <a:p>
-            <a:pPr indent="0" marL="0">
+            <a:pPr marL="0" indent="0">
               <a:buNone/>
             </a:pPr>
             <a:r>
@@ -4872,6 +4727,13 @@
             <a:prstDash val="solid"/>
           </a:ln>
         </p:spPr>
+        <p:txBody>
+          <a:bodyPr/>
+          <a:lstStyle/>
+          <a:p>
+            <a:endParaRPr lang="en-GB"/>
+          </a:p>
+        </p:txBody>
       </p:sp>
       <p:sp>
         <p:nvSpPr>
@@ -4894,7 +4756,7 @@
           <a:bodyPr wrap="square" lIns="0" tIns="0" rIns="0" bIns="0" rtlCol="0" anchor="ctr"/>
           <a:lstStyle/>
           <a:p>
-            <a:pPr algn="ctr" indent="0" marL="0">
+            <a:pPr marL="0" indent="0" algn="ctr">
               <a:buNone/>
             </a:pPr>
             <a:r>
@@ -4933,7 +4795,7 @@
           <a:bodyPr wrap="square" lIns="0" tIns="0" rIns="0" bIns="0" rtlCol="0" anchor="ctr"/>
           <a:lstStyle/>
           <a:p>
-            <a:pPr indent="0" marL="0">
+            <a:pPr marL="0" indent="0">
               <a:buNone/>
             </a:pPr>
             <a:r>
@@ -4975,6 +4837,13 @@
             <a:prstDash val="solid"/>
           </a:ln>
         </p:spPr>
+        <p:txBody>
+          <a:bodyPr/>
+          <a:lstStyle/>
+          <a:p>
+            <a:endParaRPr lang="en-GB"/>
+          </a:p>
+        </p:txBody>
       </p:sp>
       <p:sp>
         <p:nvSpPr>
@@ -4997,7 +4866,7 @@
           <a:bodyPr wrap="square" lIns="0" tIns="0" rIns="0" bIns="0" rtlCol="0" anchor="ctr"/>
           <a:lstStyle/>
           <a:p>
-            <a:pPr algn="ctr" indent="0" marL="0">
+            <a:pPr marL="0" indent="0" algn="ctr">
               <a:buNone/>
             </a:pPr>
             <a:r>
@@ -5036,7 +4905,7 @@
           <a:bodyPr wrap="square" lIns="0" tIns="0" rIns="0" bIns="0" rtlCol="0" anchor="ctr"/>
           <a:lstStyle/>
           <a:p>
-            <a:pPr indent="0" marL="0">
+            <a:pPr marL="0" indent="0">
               <a:buNone/>
             </a:pPr>
             <a:r>
@@ -5078,6 +4947,13 @@
             <a:prstDash val="solid"/>
           </a:ln>
         </p:spPr>
+        <p:txBody>
+          <a:bodyPr/>
+          <a:lstStyle/>
+          <a:p>
+            <a:endParaRPr lang="en-GB"/>
+          </a:p>
+        </p:txBody>
       </p:sp>
       <p:sp>
         <p:nvSpPr>
@@ -5100,7 +4976,7 @@
           <a:bodyPr wrap="square" lIns="0" tIns="0" rIns="0" bIns="0" rtlCol="0" anchor="ctr"/>
           <a:lstStyle/>
           <a:p>
-            <a:pPr algn="ctr" indent="0" marL="0">
+            <a:pPr marL="0" indent="0" algn="ctr">
               <a:buNone/>
             </a:pPr>
             <a:r>
@@ -5139,7 +5015,7 @@
           <a:bodyPr wrap="square" lIns="0" tIns="0" rIns="0" bIns="0" rtlCol="0" anchor="ctr"/>
           <a:lstStyle/>
           <a:p>
-            <a:pPr indent="0" marL="0">
+            <a:pPr marL="0" indent="0">
               <a:buNone/>
             </a:pPr>
             <a:r>
@@ -5173,6 +5049,7 @@
         <a:solidFill>
           <a:srgbClr val="F6F6F8"/>
         </a:solidFill>
+        <a:effectLst/>
       </p:bgPr>
     </p:bg>
     <p:spTree>
@@ -5210,7 +5087,7 @@
           <a:bodyPr wrap="square" lIns="0" tIns="0" rIns="0" bIns="0" rtlCol="0" anchor="ctr"/>
           <a:lstStyle/>
           <a:p>
-            <a:pPr indent="0" marL="0">
+            <a:pPr marL="0" indent="0">
               <a:buNone/>
             </a:pPr>
             <a:r>
@@ -5254,13 +5131,20 @@
             <a:prstDash val="solid"/>
           </a:ln>
           <a:effectLst>
-            <a:outerShdw sx="100000" sy="100000" kx="0" ky="0" algn="bl" rotWithShape="0" blurRad="76200" dist="25400" dir="5400000">
+            <a:outerShdw blurRad="76200" dist="25400" dir="5400000" algn="bl" rotWithShape="0">
               <a:srgbClr val="000000">
                 <a:alpha val="8000"/>
               </a:srgbClr>
             </a:outerShdw>
           </a:effectLst>
         </p:spPr>
+        <p:txBody>
+          <a:bodyPr/>
+          <a:lstStyle/>
+          <a:p>
+            <a:endParaRPr lang="en-GB"/>
+          </a:p>
+        </p:txBody>
       </p:sp>
       <p:sp>
         <p:nvSpPr>
@@ -5286,6 +5170,13 @@
             <a:prstDash val="solid"/>
           </a:ln>
         </p:spPr>
+        <p:txBody>
+          <a:bodyPr/>
+          <a:lstStyle/>
+          <a:p>
+            <a:endParaRPr lang="en-GB"/>
+          </a:p>
+        </p:txBody>
       </p:sp>
       <p:sp>
         <p:nvSpPr>
@@ -5308,7 +5199,7 @@
           <a:bodyPr wrap="square" lIns="0" tIns="0" rIns="0" bIns="0" rtlCol="0" anchor="ctr"/>
           <a:lstStyle/>
           <a:p>
-            <a:pPr algn="ctr" indent="0" marL="0">
+            <a:pPr marL="0" indent="0" algn="ctr">
               <a:buNone/>
             </a:pPr>
             <a:r>
@@ -5347,7 +5238,7 @@
           <a:bodyPr wrap="square" lIns="0" tIns="0" rIns="0" bIns="0" rtlCol="0" anchor="ctr"/>
           <a:lstStyle/>
           <a:p>
-            <a:pPr indent="0" marL="0">
+            <a:pPr marL="0" indent="0">
               <a:buNone/>
             </a:pPr>
             <a:r>
@@ -5386,7 +5277,7 @@
           <a:bodyPr wrap="square" lIns="0" tIns="0" rIns="0" bIns="0" rtlCol="0" anchor="ctr"/>
           <a:lstStyle/>
           <a:p>
-            <a:pPr indent="0" marL="0">
+            <a:pPr marL="0" indent="0">
               <a:buNone/>
             </a:pPr>
             <a:r>
@@ -5425,7 +5316,7 @@
           <a:bodyPr wrap="square" lIns="0" tIns="0" rIns="0" bIns="0" rtlCol="0" anchor="ctr"/>
           <a:lstStyle/>
           <a:p>
-            <a:pPr algn="r" indent="0" marL="0">
+            <a:pPr marL="0" indent="0" algn="r">
               <a:buNone/>
             </a:pPr>
             <a:r>
@@ -5469,13 +5360,20 @@
             <a:prstDash val="solid"/>
           </a:ln>
           <a:effectLst>
-            <a:outerShdw sx="100000" sy="100000" kx="0" ky="0" algn="bl" rotWithShape="0" blurRad="76200" dist="25400" dir="5400000">
+            <a:outerShdw blurRad="76200" dist="25400" dir="5400000" algn="bl" rotWithShape="0">
               <a:srgbClr val="000000">
                 <a:alpha val="8000"/>
               </a:srgbClr>
             </a:outerShdw>
           </a:effectLst>
         </p:spPr>
+        <p:txBody>
+          <a:bodyPr/>
+          <a:lstStyle/>
+          <a:p>
+            <a:endParaRPr lang="en-GB"/>
+          </a:p>
+        </p:txBody>
       </p:sp>
       <p:sp>
         <p:nvSpPr>
@@ -5501,6 +5399,13 @@
             <a:prstDash val="solid"/>
           </a:ln>
         </p:spPr>
+        <p:txBody>
+          <a:bodyPr/>
+          <a:lstStyle/>
+          <a:p>
+            <a:endParaRPr lang="en-GB"/>
+          </a:p>
+        </p:txBody>
       </p:sp>
       <p:sp>
         <p:nvSpPr>
@@ -5523,7 +5428,7 @@
           <a:bodyPr wrap="square" lIns="0" tIns="0" rIns="0" bIns="0" rtlCol="0" anchor="ctr"/>
           <a:lstStyle/>
           <a:p>
-            <a:pPr algn="ctr" indent="0" marL="0">
+            <a:pPr marL="0" indent="0" algn="ctr">
               <a:buNone/>
             </a:pPr>
             <a:r>
@@ -5562,7 +5467,7 @@
           <a:bodyPr wrap="square" lIns="0" tIns="0" rIns="0" bIns="0" rtlCol="0" anchor="ctr"/>
           <a:lstStyle/>
           <a:p>
-            <a:pPr indent="0" marL="0">
+            <a:pPr marL="0" indent="0">
               <a:buNone/>
             </a:pPr>
             <a:r>
@@ -5601,7 +5506,7 @@
           <a:bodyPr wrap="square" lIns="0" tIns="0" rIns="0" bIns="0" rtlCol="0" anchor="ctr"/>
           <a:lstStyle/>
           <a:p>
-            <a:pPr indent="0" marL="0">
+            <a:pPr marL="0" indent="0">
               <a:buNone/>
             </a:pPr>
             <a:r>
@@ -5640,7 +5545,7 @@
           <a:bodyPr wrap="square" lIns="0" tIns="0" rIns="0" bIns="0" rtlCol="0" anchor="ctr"/>
           <a:lstStyle/>
           <a:p>
-            <a:pPr algn="r" indent="0" marL="0">
+            <a:pPr marL="0" indent="0" algn="r">
               <a:buNone/>
             </a:pPr>
             <a:r>
@@ -5684,13 +5589,20 @@
             <a:prstDash val="solid"/>
           </a:ln>
           <a:effectLst>
-            <a:outerShdw sx="100000" sy="100000" kx="0" ky="0" algn="bl" rotWithShape="0" blurRad="76200" dist="25400" dir="5400000">
+            <a:outerShdw blurRad="76200" dist="25400" dir="5400000" algn="bl" rotWithShape="0">
               <a:srgbClr val="000000">
                 <a:alpha val="8000"/>
               </a:srgbClr>
             </a:outerShdw>
           </a:effectLst>
         </p:spPr>
+        <p:txBody>
+          <a:bodyPr/>
+          <a:lstStyle/>
+          <a:p>
+            <a:endParaRPr lang="en-GB"/>
+          </a:p>
+        </p:txBody>
       </p:sp>
       <p:sp>
         <p:nvSpPr>
@@ -5716,6 +5628,13 @@
             <a:prstDash val="solid"/>
           </a:ln>
         </p:spPr>
+        <p:txBody>
+          <a:bodyPr/>
+          <a:lstStyle/>
+          <a:p>
+            <a:endParaRPr lang="en-GB"/>
+          </a:p>
+        </p:txBody>
       </p:sp>
       <p:sp>
         <p:nvSpPr>
@@ -5738,7 +5657,7 @@
           <a:bodyPr wrap="square" lIns="0" tIns="0" rIns="0" bIns="0" rtlCol="0" anchor="ctr"/>
           <a:lstStyle/>
           <a:p>
-            <a:pPr algn="ctr" indent="0" marL="0">
+            <a:pPr marL="0" indent="0" algn="ctr">
               <a:buNone/>
             </a:pPr>
             <a:r>
@@ -5777,7 +5696,7 @@
           <a:bodyPr wrap="square" lIns="0" tIns="0" rIns="0" bIns="0" rtlCol="0" anchor="ctr"/>
           <a:lstStyle/>
           <a:p>
-            <a:pPr indent="0" marL="0">
+            <a:pPr marL="0" indent="0">
               <a:buNone/>
             </a:pPr>
             <a:r>
@@ -5816,7 +5735,7 @@
           <a:bodyPr wrap="square" lIns="0" tIns="0" rIns="0" bIns="0" rtlCol="0" anchor="ctr"/>
           <a:lstStyle/>
           <a:p>
-            <a:pPr indent="0" marL="0">
+            <a:pPr marL="0" indent="0">
               <a:buNone/>
             </a:pPr>
             <a:r>
@@ -5855,7 +5774,7 @@
           <a:bodyPr wrap="square" lIns="0" tIns="0" rIns="0" bIns="0" rtlCol="0" anchor="ctr"/>
           <a:lstStyle/>
           <a:p>
-            <a:pPr algn="r" indent="0" marL="0">
+            <a:pPr marL="0" indent="0" algn="r">
               <a:buNone/>
             </a:pPr>
             <a:r>
@@ -5899,13 +5818,20 @@
             <a:prstDash val="solid"/>
           </a:ln>
           <a:effectLst>
-            <a:outerShdw sx="100000" sy="100000" kx="0" ky="0" algn="bl" rotWithShape="0" blurRad="76200" dist="25400" dir="5400000">
+            <a:outerShdw blurRad="76200" dist="25400" dir="5400000" algn="bl" rotWithShape="0">
               <a:srgbClr val="000000">
                 <a:alpha val="8000"/>
               </a:srgbClr>
             </a:outerShdw>
           </a:effectLst>
         </p:spPr>
+        <p:txBody>
+          <a:bodyPr/>
+          <a:lstStyle/>
+          <a:p>
+            <a:endParaRPr lang="en-GB"/>
+          </a:p>
+        </p:txBody>
       </p:sp>
       <p:sp>
         <p:nvSpPr>
@@ -5931,6 +5857,13 @@
             <a:prstDash val="solid"/>
           </a:ln>
         </p:spPr>
+        <p:txBody>
+          <a:bodyPr/>
+          <a:lstStyle/>
+          <a:p>
+            <a:endParaRPr lang="en-GB"/>
+          </a:p>
+        </p:txBody>
       </p:sp>
       <p:sp>
         <p:nvSpPr>
@@ -5953,7 +5886,7 @@
           <a:bodyPr wrap="square" lIns="0" tIns="0" rIns="0" bIns="0" rtlCol="0" anchor="ctr"/>
           <a:lstStyle/>
           <a:p>
-            <a:pPr algn="ctr" indent="0" marL="0">
+            <a:pPr marL="0" indent="0" algn="ctr">
               <a:buNone/>
             </a:pPr>
             <a:r>
@@ -5992,7 +5925,7 @@
           <a:bodyPr wrap="square" lIns="0" tIns="0" rIns="0" bIns="0" rtlCol="0" anchor="ctr"/>
           <a:lstStyle/>
           <a:p>
-            <a:pPr indent="0" marL="0">
+            <a:pPr marL="0" indent="0">
               <a:buNone/>
             </a:pPr>
             <a:r>
@@ -6031,7 +5964,7 @@
           <a:bodyPr wrap="square" lIns="0" tIns="0" rIns="0" bIns="0" rtlCol="0" anchor="ctr"/>
           <a:lstStyle/>
           <a:p>
-            <a:pPr indent="0" marL="0">
+            <a:pPr marL="0" indent="0">
               <a:buNone/>
             </a:pPr>
             <a:r>
@@ -6070,7 +6003,7 @@
           <a:bodyPr wrap="square" lIns="0" tIns="0" rIns="0" bIns="0" rtlCol="0" anchor="ctr"/>
           <a:lstStyle/>
           <a:p>
-            <a:pPr algn="r" indent="0" marL="0">
+            <a:pPr marL="0" indent="0" algn="r">
               <a:buNone/>
             </a:pPr>
             <a:r>
@@ -6114,13 +6047,20 @@
             <a:prstDash val="solid"/>
           </a:ln>
           <a:effectLst>
-            <a:outerShdw sx="100000" sy="100000" kx="0" ky="0" algn="bl" rotWithShape="0" blurRad="76200" dist="25400" dir="5400000">
+            <a:outerShdw blurRad="76200" dist="25400" dir="5400000" algn="bl" rotWithShape="0">
               <a:srgbClr val="000000">
                 <a:alpha val="8000"/>
               </a:srgbClr>
             </a:outerShdw>
           </a:effectLst>
         </p:spPr>
+        <p:txBody>
+          <a:bodyPr/>
+          <a:lstStyle/>
+          <a:p>
+            <a:endParaRPr lang="en-GB"/>
+          </a:p>
+        </p:txBody>
       </p:sp>
       <p:sp>
         <p:nvSpPr>
@@ -6146,6 +6086,13 @@
             <a:prstDash val="solid"/>
           </a:ln>
         </p:spPr>
+        <p:txBody>
+          <a:bodyPr/>
+          <a:lstStyle/>
+          <a:p>
+            <a:endParaRPr lang="en-GB"/>
+          </a:p>
+        </p:txBody>
       </p:sp>
       <p:sp>
         <p:nvSpPr>
@@ -6168,7 +6115,7 @@
           <a:bodyPr wrap="square" lIns="0" tIns="0" rIns="0" bIns="0" rtlCol="0" anchor="ctr"/>
           <a:lstStyle/>
           <a:p>
-            <a:pPr algn="ctr" indent="0" marL="0">
+            <a:pPr marL="0" indent="0" algn="ctr">
               <a:buNone/>
             </a:pPr>
             <a:r>
@@ -6207,7 +6154,7 @@
           <a:bodyPr wrap="square" lIns="0" tIns="0" rIns="0" bIns="0" rtlCol="0" anchor="ctr"/>
           <a:lstStyle/>
           <a:p>
-            <a:pPr indent="0" marL="0">
+            <a:pPr marL="0" indent="0">
               <a:buNone/>
             </a:pPr>
             <a:r>
@@ -6246,7 +6193,7 @@
           <a:bodyPr wrap="square" lIns="0" tIns="0" rIns="0" bIns="0" rtlCol="0" anchor="ctr"/>
           <a:lstStyle/>
           <a:p>
-            <a:pPr indent="0" marL="0">
+            <a:pPr marL="0" indent="0">
               <a:buNone/>
             </a:pPr>
             <a:r>
@@ -6285,7 +6232,7 @@
           <a:bodyPr wrap="square" lIns="0" tIns="0" rIns="0" bIns="0" rtlCol="0" anchor="ctr"/>
           <a:lstStyle/>
           <a:p>
-            <a:pPr algn="r" indent="0" marL="0">
+            <a:pPr marL="0" indent="0" algn="r">
               <a:buNone/>
             </a:pPr>
             <a:r>
@@ -6329,13 +6276,20 @@
             <a:prstDash val="solid"/>
           </a:ln>
           <a:effectLst>
-            <a:outerShdw sx="100000" sy="100000" kx="0" ky="0" algn="bl" rotWithShape="0" blurRad="76200" dist="25400" dir="5400000">
+            <a:outerShdw blurRad="76200" dist="25400" dir="5400000" algn="bl" rotWithShape="0">
               <a:srgbClr val="000000">
                 <a:alpha val="8000"/>
               </a:srgbClr>
             </a:outerShdw>
           </a:effectLst>
         </p:spPr>
+        <p:txBody>
+          <a:bodyPr/>
+          <a:lstStyle/>
+          <a:p>
+            <a:endParaRPr lang="en-GB"/>
+          </a:p>
+        </p:txBody>
       </p:sp>
       <p:sp>
         <p:nvSpPr>
@@ -6361,6 +6315,13 @@
             <a:prstDash val="solid"/>
           </a:ln>
         </p:spPr>
+        <p:txBody>
+          <a:bodyPr/>
+          <a:lstStyle/>
+          <a:p>
+            <a:endParaRPr lang="en-GB"/>
+          </a:p>
+        </p:txBody>
       </p:sp>
       <p:sp>
         <p:nvSpPr>
@@ -6383,7 +6344,7 @@
           <a:bodyPr wrap="square" lIns="0" tIns="0" rIns="0" bIns="0" rtlCol="0" anchor="ctr"/>
           <a:lstStyle/>
           <a:p>
-            <a:pPr algn="ctr" indent="0" marL="0">
+            <a:pPr marL="0" indent="0" algn="ctr">
               <a:buNone/>
             </a:pPr>
             <a:r>
@@ -6422,7 +6383,7 @@
           <a:bodyPr wrap="square" lIns="0" tIns="0" rIns="0" bIns="0" rtlCol="0" anchor="ctr"/>
           <a:lstStyle/>
           <a:p>
-            <a:pPr indent="0" marL="0">
+            <a:pPr marL="0" indent="0">
               <a:buNone/>
             </a:pPr>
             <a:r>
@@ -6461,7 +6422,7 @@
           <a:bodyPr wrap="square" lIns="0" tIns="0" rIns="0" bIns="0" rtlCol="0" anchor="ctr"/>
           <a:lstStyle/>
           <a:p>
-            <a:pPr indent="0" marL="0">
+            <a:pPr marL="0" indent="0">
               <a:buNone/>
             </a:pPr>
             <a:r>
@@ -6500,7 +6461,7 @@
           <a:bodyPr wrap="square" lIns="0" tIns="0" rIns="0" bIns="0" rtlCol="0" anchor="ctr"/>
           <a:lstStyle/>
           <a:p>
-            <a:pPr algn="r" indent="0" marL="0">
+            <a:pPr marL="0" indent="0" algn="r">
               <a:buNone/>
             </a:pPr>
             <a:r>
@@ -6534,6 +6495,7 @@
         <a:solidFill>
           <a:srgbClr val="F6F6F8"/>
         </a:solidFill>
+        <a:effectLst/>
       </p:bgPr>
     </p:bg>
     <p:spTree>
@@ -6574,6 +6536,13 @@
             <a:prstDash val="solid"/>
           </a:ln>
         </p:spPr>
+        <p:txBody>
+          <a:bodyPr/>
+          <a:lstStyle/>
+          <a:p>
+            <a:endParaRPr lang="en-GB"/>
+          </a:p>
+        </p:txBody>
       </p:sp>
       <p:sp>
         <p:nvSpPr>
@@ -6596,7 +6565,7 @@
           <a:bodyPr wrap="square" lIns="0" tIns="0" rIns="0" bIns="0" rtlCol="0" anchor="ctr"/>
           <a:lstStyle/>
           <a:p>
-            <a:pPr algn="ctr" indent="0" marL="0">
+            <a:pPr marL="0" indent="0" algn="ctr">
               <a:buNone/>
             </a:pPr>
             <a:r>
@@ -6635,7 +6604,7 @@
           <a:bodyPr wrap="square" lIns="0" tIns="0" rIns="0" bIns="0" rtlCol="0" anchor="ctr"/>
           <a:lstStyle/>
           <a:p>
-            <a:pPr indent="0" marL="0">
+            <a:pPr marL="0" indent="0">
               <a:buNone/>
             </a:pPr>
             <a:r>
@@ -6661,8 +6630,8 @@
         </p:nvSpPr>
         <p:spPr>
           <a:xfrm>
-            <a:off x="457200" y="1188720"/>
-            <a:ext cx="3931920" cy="1645920"/>
+            <a:off x="457200" y="1188719"/>
+            <a:ext cx="3931920" cy="1871565"/>
           </a:xfrm>
           <a:prstGeom prst="roundRect">
             <a:avLst>
@@ -6679,13 +6648,20 @@
             <a:prstDash val="solid"/>
           </a:ln>
           <a:effectLst>
-            <a:outerShdw sx="100000" sy="100000" kx="0" ky="0" algn="bl" rotWithShape="0" blurRad="76200" dist="25400" dir="5400000">
+            <a:outerShdw blurRad="76200" dist="25400" dir="5400000" algn="bl" rotWithShape="0">
               <a:srgbClr val="000000">
                 <a:alpha val="8000"/>
               </a:srgbClr>
             </a:outerShdw>
           </a:effectLst>
         </p:spPr>
+        <p:txBody>
+          <a:bodyPr/>
+          <a:lstStyle/>
+          <a:p>
+            <a:endParaRPr lang="en-GB"/>
+          </a:p>
+        </p:txBody>
       </p:sp>
       <p:sp>
         <p:nvSpPr>
@@ -6708,7 +6684,7 @@
           <a:bodyPr wrap="square" lIns="0" tIns="0" rIns="0" bIns="0" rtlCol="0" anchor="ctr"/>
           <a:lstStyle/>
           <a:p>
-            <a:pPr indent="0" marL="0">
+            <a:pPr marL="0" indent="0">
               <a:buNone/>
             </a:pPr>
             <a:r>
@@ -6820,7 +6796,7 @@
         <p:spPr>
           <a:xfrm>
             <a:off x="4572000" y="1188720"/>
-            <a:ext cx="4114800" cy="1645920"/>
+            <a:ext cx="4114800" cy="1871564"/>
           </a:xfrm>
           <a:prstGeom prst="roundRect">
             <a:avLst>
@@ -6837,13 +6813,20 @@
             <a:prstDash val="solid"/>
           </a:ln>
           <a:effectLst>
-            <a:outerShdw sx="100000" sy="100000" kx="0" ky="0" algn="bl" rotWithShape="0" blurRad="76200" dist="25400" dir="5400000">
+            <a:outerShdw blurRad="76200" dist="25400" dir="5400000" algn="bl" rotWithShape="0">
               <a:srgbClr val="000000">
                 <a:alpha val="8000"/>
               </a:srgbClr>
             </a:outerShdw>
           </a:effectLst>
         </p:spPr>
+        <p:txBody>
+          <a:bodyPr/>
+          <a:lstStyle/>
+          <a:p>
+            <a:endParaRPr lang="en-GB"/>
+          </a:p>
+        </p:txBody>
       </p:sp>
       <p:sp>
         <p:nvSpPr>
@@ -6866,7 +6849,7 @@
           <a:bodyPr wrap="square" lIns="0" tIns="0" rIns="0" bIns="0" rtlCol="0" anchor="ctr"/>
           <a:lstStyle/>
           <a:p>
-            <a:pPr indent="0" marL="0">
+            <a:pPr marL="0" indent="0">
               <a:buNone/>
             </a:pPr>
             <a:r>
@@ -6977,7 +6960,7 @@
         </p:nvSpPr>
         <p:spPr>
           <a:xfrm>
-            <a:off x="457200" y="3063240"/>
+            <a:off x="457200" y="3151725"/>
             <a:ext cx="2743200" cy="320040"/>
           </a:xfrm>
           <a:prstGeom prst="rect">
@@ -6990,7 +6973,7 @@
           <a:bodyPr wrap="square" lIns="0" tIns="0" rIns="0" bIns="0" rtlCol="0" anchor="ctr"/>
           <a:lstStyle/>
           <a:p>
-            <a:pPr indent="0" marL="0">
+            <a:pPr marL="0" indent="0">
               <a:buNone/>
             </a:pPr>
             <a:r>
@@ -7016,7 +6999,7 @@
         </p:nvSpPr>
         <p:spPr>
           <a:xfrm>
-            <a:off x="457200" y="3474720"/>
+            <a:off x="457200" y="3563205"/>
             <a:ext cx="1234440" cy="731520"/>
           </a:xfrm>
           <a:prstGeom prst="roundRect">
@@ -7034,6 +7017,13 @@
             <a:prstDash val="solid"/>
           </a:ln>
         </p:spPr>
+        <p:txBody>
+          <a:bodyPr/>
+          <a:lstStyle/>
+          <a:p>
+            <a:endParaRPr lang="en-GB"/>
+          </a:p>
+        </p:txBody>
       </p:sp>
       <p:sp>
         <p:nvSpPr>
@@ -7043,7 +7033,7 @@
         </p:nvSpPr>
         <p:spPr>
           <a:xfrm>
-            <a:off x="457200" y="3474720"/>
+            <a:off x="457200" y="3563205"/>
             <a:ext cx="1234440" cy="731520"/>
           </a:xfrm>
           <a:prstGeom prst="rect">
@@ -7056,7 +7046,7 @@
           <a:bodyPr wrap="square" lIns="635" tIns="635" rIns="635" bIns="635" rtlCol="0" anchor="ctr"/>
           <a:lstStyle/>
           <a:p>
-            <a:pPr algn="ctr" indent="0" marL="0">
+            <a:pPr marL="0" indent="0" algn="ctr">
               <a:buNone/>
             </a:pPr>
             <a:r>
@@ -7073,7 +7063,7 @@
             <a:endParaRPr lang="en-US" sz="1100" dirty="0"/>
           </a:p>
           <a:p>
-            <a:pPr algn="ctr" indent="0" marL="0">
+            <a:pPr marL="0" indent="0" algn="ctr">
               <a:buNone/>
             </a:pPr>
             <a:r>
@@ -7099,7 +7089,7 @@
         </p:nvSpPr>
         <p:spPr>
           <a:xfrm>
-            <a:off x="1673352" y="3474720"/>
+            <a:off x="1673352" y="3563205"/>
             <a:ext cx="201168" cy="731520"/>
           </a:xfrm>
           <a:prstGeom prst="rect">
@@ -7112,7 +7102,7 @@
           <a:bodyPr wrap="square" lIns="0" tIns="0" rIns="0" bIns="0" rtlCol="0" anchor="ctr"/>
           <a:lstStyle/>
           <a:p>
-            <a:pPr algn="ctr" indent="0" marL="0">
+            <a:pPr marL="0" indent="0" algn="ctr">
               <a:buNone/>
             </a:pPr>
             <a:r>
@@ -7135,7 +7125,7 @@
         </p:nvSpPr>
         <p:spPr>
           <a:xfrm>
-            <a:off x="1856232" y="3474720"/>
+            <a:off x="1856232" y="3563205"/>
             <a:ext cx="1234440" cy="731520"/>
           </a:xfrm>
           <a:prstGeom prst="roundRect">
@@ -7153,6 +7143,13 @@
             <a:prstDash val="solid"/>
           </a:ln>
         </p:spPr>
+        <p:txBody>
+          <a:bodyPr/>
+          <a:lstStyle/>
+          <a:p>
+            <a:endParaRPr lang="en-GB"/>
+          </a:p>
+        </p:txBody>
       </p:sp>
       <p:sp>
         <p:nvSpPr>
@@ -7162,7 +7159,7 @@
         </p:nvSpPr>
         <p:spPr>
           <a:xfrm>
-            <a:off x="1856232" y="3474720"/>
+            <a:off x="1856232" y="3563205"/>
             <a:ext cx="1234440" cy="731520"/>
           </a:xfrm>
           <a:prstGeom prst="rect">
@@ -7175,7 +7172,7 @@
           <a:bodyPr wrap="square" lIns="635" tIns="635" rIns="635" bIns="635" rtlCol="0" anchor="ctr"/>
           <a:lstStyle/>
           <a:p>
-            <a:pPr algn="ctr" indent="0" marL="0">
+            <a:pPr marL="0" indent="0" algn="ctr">
               <a:buNone/>
             </a:pPr>
             <a:r>
@@ -7192,7 +7189,7 @@
             <a:endParaRPr lang="en-US" sz="1100" dirty="0"/>
           </a:p>
           <a:p>
-            <a:pPr algn="ctr" indent="0" marL="0">
+            <a:pPr marL="0" indent="0" algn="ctr">
               <a:buNone/>
             </a:pPr>
             <a:r>
@@ -7218,7 +7215,7 @@
         </p:nvSpPr>
         <p:spPr>
           <a:xfrm>
-            <a:off x="3072384" y="3474720"/>
+            <a:off x="3072384" y="3563205"/>
             <a:ext cx="201168" cy="731520"/>
           </a:xfrm>
           <a:prstGeom prst="rect">
@@ -7231,7 +7228,7 @@
           <a:bodyPr wrap="square" lIns="0" tIns="0" rIns="0" bIns="0" rtlCol="0" anchor="ctr"/>
           <a:lstStyle/>
           <a:p>
-            <a:pPr algn="ctr" indent="0" marL="0">
+            <a:pPr marL="0" indent="0" algn="ctr">
               <a:buNone/>
             </a:pPr>
             <a:r>
@@ -7254,7 +7251,7 @@
         </p:nvSpPr>
         <p:spPr>
           <a:xfrm>
-            <a:off x="3255264" y="3474720"/>
+            <a:off x="3255264" y="3563205"/>
             <a:ext cx="1234440" cy="731520"/>
           </a:xfrm>
           <a:prstGeom prst="roundRect">
@@ -7272,6 +7269,13 @@
             <a:prstDash val="solid"/>
           </a:ln>
         </p:spPr>
+        <p:txBody>
+          <a:bodyPr/>
+          <a:lstStyle/>
+          <a:p>
+            <a:endParaRPr lang="en-GB"/>
+          </a:p>
+        </p:txBody>
       </p:sp>
       <p:sp>
         <p:nvSpPr>
@@ -7281,7 +7285,7 @@
         </p:nvSpPr>
         <p:spPr>
           <a:xfrm>
-            <a:off x="3255264" y="3474720"/>
+            <a:off x="3255264" y="3563205"/>
             <a:ext cx="1234440" cy="731520"/>
           </a:xfrm>
           <a:prstGeom prst="rect">
@@ -7294,7 +7298,7 @@
           <a:bodyPr wrap="square" lIns="635" tIns="635" rIns="635" bIns="635" rtlCol="0" anchor="ctr"/>
           <a:lstStyle/>
           <a:p>
-            <a:pPr algn="ctr" indent="0" marL="0">
+            <a:pPr marL="0" indent="0" algn="ctr">
               <a:buNone/>
             </a:pPr>
             <a:r>
@@ -7311,7 +7315,7 @@
             <a:endParaRPr lang="en-US" sz="1100" dirty="0"/>
           </a:p>
           <a:p>
-            <a:pPr algn="ctr" indent="0" marL="0">
+            <a:pPr marL="0" indent="0" algn="ctr">
               <a:buNone/>
             </a:pPr>
             <a:r>
@@ -7337,7 +7341,7 @@
         </p:nvSpPr>
         <p:spPr>
           <a:xfrm>
-            <a:off x="4471416" y="3474720"/>
+            <a:off x="4471416" y="3563205"/>
             <a:ext cx="201168" cy="731520"/>
           </a:xfrm>
           <a:prstGeom prst="rect">
@@ -7350,7 +7354,7 @@
           <a:bodyPr wrap="square" lIns="0" tIns="0" rIns="0" bIns="0" rtlCol="0" anchor="ctr"/>
           <a:lstStyle/>
           <a:p>
-            <a:pPr algn="ctr" indent="0" marL="0">
+            <a:pPr marL="0" indent="0" algn="ctr">
               <a:buNone/>
             </a:pPr>
             <a:r>
@@ -7373,7 +7377,7 @@
         </p:nvSpPr>
         <p:spPr>
           <a:xfrm>
-            <a:off x="4654296" y="3474720"/>
+            <a:off x="4654296" y="3563205"/>
             <a:ext cx="1234440" cy="731520"/>
           </a:xfrm>
           <a:prstGeom prst="roundRect">
@@ -7391,6 +7395,13 @@
             <a:prstDash val="solid"/>
           </a:ln>
         </p:spPr>
+        <p:txBody>
+          <a:bodyPr/>
+          <a:lstStyle/>
+          <a:p>
+            <a:endParaRPr lang="en-GB"/>
+          </a:p>
+        </p:txBody>
       </p:sp>
       <p:sp>
         <p:nvSpPr>
@@ -7400,7 +7411,7 @@
         </p:nvSpPr>
         <p:spPr>
           <a:xfrm>
-            <a:off x="4654296" y="3474720"/>
+            <a:off x="4654296" y="3563205"/>
             <a:ext cx="1234440" cy="731520"/>
           </a:xfrm>
           <a:prstGeom prst="rect">
@@ -7413,7 +7424,7 @@
           <a:bodyPr wrap="square" lIns="635" tIns="635" rIns="635" bIns="635" rtlCol="0" anchor="ctr"/>
           <a:lstStyle/>
           <a:p>
-            <a:pPr algn="ctr" indent="0" marL="0">
+            <a:pPr marL="0" indent="0" algn="ctr">
               <a:buNone/>
             </a:pPr>
             <a:r>
@@ -7430,7 +7441,7 @@
             <a:endParaRPr lang="en-US" sz="1100" dirty="0"/>
           </a:p>
           <a:p>
-            <a:pPr algn="ctr" indent="0" marL="0">
+            <a:pPr marL="0" indent="0" algn="ctr">
               <a:buNone/>
             </a:pPr>
             <a:r>
@@ -7456,7 +7467,7 @@
         </p:nvSpPr>
         <p:spPr>
           <a:xfrm>
-            <a:off x="5870448" y="3474720"/>
+            <a:off x="5870448" y="3563205"/>
             <a:ext cx="201168" cy="731520"/>
           </a:xfrm>
           <a:prstGeom prst="rect">
@@ -7469,7 +7480,7 @@
           <a:bodyPr wrap="square" lIns="0" tIns="0" rIns="0" bIns="0" rtlCol="0" anchor="ctr"/>
           <a:lstStyle/>
           <a:p>
-            <a:pPr algn="ctr" indent="0" marL="0">
+            <a:pPr marL="0" indent="0" algn="ctr">
               <a:buNone/>
             </a:pPr>
             <a:r>
@@ -7492,7 +7503,7 @@
         </p:nvSpPr>
         <p:spPr>
           <a:xfrm>
-            <a:off x="6053328" y="3474720"/>
+            <a:off x="6053328" y="3563205"/>
             <a:ext cx="1234440" cy="731520"/>
           </a:xfrm>
           <a:prstGeom prst="roundRect">
@@ -7510,6 +7521,13 @@
             <a:prstDash val="solid"/>
           </a:ln>
         </p:spPr>
+        <p:txBody>
+          <a:bodyPr/>
+          <a:lstStyle/>
+          <a:p>
+            <a:endParaRPr lang="en-GB"/>
+          </a:p>
+        </p:txBody>
       </p:sp>
       <p:sp>
         <p:nvSpPr>
@@ -7519,7 +7537,7 @@
         </p:nvSpPr>
         <p:spPr>
           <a:xfrm>
-            <a:off x="6053328" y="3474720"/>
+            <a:off x="6053328" y="3563205"/>
             <a:ext cx="1234440" cy="731520"/>
           </a:xfrm>
           <a:prstGeom prst="rect">
@@ -7532,7 +7550,7 @@
           <a:bodyPr wrap="square" lIns="635" tIns="635" rIns="635" bIns="635" rtlCol="0" anchor="ctr"/>
           <a:lstStyle/>
           <a:p>
-            <a:pPr algn="ctr" indent="0" marL="0">
+            <a:pPr marL="0" indent="0" algn="ctr">
               <a:buNone/>
             </a:pPr>
             <a:r>
@@ -7549,7 +7567,7 @@
             <a:endParaRPr lang="en-US" sz="1100" dirty="0"/>
           </a:p>
           <a:p>
-            <a:pPr algn="ctr" indent="0" marL="0">
+            <a:pPr marL="0" indent="0" algn="ctr">
               <a:buNone/>
             </a:pPr>
             <a:r>
@@ -7575,7 +7593,7 @@
         </p:nvSpPr>
         <p:spPr>
           <a:xfrm>
-            <a:off x="7269480" y="3474720"/>
+            <a:off x="7269480" y="3563205"/>
             <a:ext cx="201168" cy="731520"/>
           </a:xfrm>
           <a:prstGeom prst="rect">
@@ -7588,7 +7606,7 @@
           <a:bodyPr wrap="square" lIns="0" tIns="0" rIns="0" bIns="0" rtlCol="0" anchor="ctr"/>
           <a:lstStyle/>
           <a:p>
-            <a:pPr algn="ctr" indent="0" marL="0">
+            <a:pPr marL="0" indent="0" algn="ctr">
               <a:buNone/>
             </a:pPr>
             <a:r>
@@ -7611,7 +7629,7 @@
         </p:nvSpPr>
         <p:spPr>
           <a:xfrm>
-            <a:off x="7452360" y="3474720"/>
+            <a:off x="7452360" y="3563205"/>
             <a:ext cx="1234440" cy="731520"/>
           </a:xfrm>
           <a:prstGeom prst="roundRect">
@@ -7629,6 +7647,13 @@
             <a:prstDash val="solid"/>
           </a:ln>
         </p:spPr>
+        <p:txBody>
+          <a:bodyPr/>
+          <a:lstStyle/>
+          <a:p>
+            <a:endParaRPr lang="en-GB"/>
+          </a:p>
+        </p:txBody>
       </p:sp>
       <p:sp>
         <p:nvSpPr>
@@ -7638,7 +7663,7 @@
         </p:nvSpPr>
         <p:spPr>
           <a:xfrm>
-            <a:off x="7452360" y="3474720"/>
+            <a:off x="7452360" y="3563205"/>
             <a:ext cx="1234440" cy="731520"/>
           </a:xfrm>
           <a:prstGeom prst="rect">
@@ -7651,7 +7676,7 @@
           <a:bodyPr wrap="square" lIns="635" tIns="635" rIns="635" bIns="635" rtlCol="0" anchor="ctr"/>
           <a:lstStyle/>
           <a:p>
-            <a:pPr algn="ctr" indent="0" marL="0">
+            <a:pPr marL="0" indent="0" algn="ctr">
               <a:buNone/>
             </a:pPr>
             <a:r>
@@ -7668,7 +7693,7 @@
             <a:endParaRPr lang="en-US" sz="1100" dirty="0"/>
           </a:p>
           <a:p>
-            <a:pPr algn="ctr" indent="0" marL="0">
+            <a:pPr marL="0" indent="0" algn="ctr">
               <a:buNone/>
             </a:pPr>
             <a:r>
@@ -7707,7 +7732,7 @@
           <a:bodyPr wrap="square" lIns="0" tIns="0" rIns="0" bIns="0" rtlCol="0" anchor="ctr"/>
           <a:lstStyle/>
           <a:p>
-            <a:pPr indent="0" marL="0">
+            <a:pPr marL="0" indent="0">
               <a:buNone/>
             </a:pPr>
             <a:r>
@@ -7741,6 +7766,7 @@
         <a:solidFill>
           <a:srgbClr val="F6F6F8"/>
         </a:solidFill>
+        <a:effectLst/>
       </p:bgPr>
     </p:bg>
     <p:spTree>
@@ -7781,6 +7807,13 @@
             <a:prstDash val="solid"/>
           </a:ln>
         </p:spPr>
+        <p:txBody>
+          <a:bodyPr/>
+          <a:lstStyle/>
+          <a:p>
+            <a:endParaRPr lang="en-GB"/>
+          </a:p>
+        </p:txBody>
       </p:sp>
       <p:sp>
         <p:nvSpPr>
@@ -7803,7 +7836,7 @@
           <a:bodyPr wrap="square" lIns="0" tIns="0" rIns="0" bIns="0" rtlCol="0" anchor="ctr"/>
           <a:lstStyle/>
           <a:p>
-            <a:pPr algn="ctr" indent="0" marL="0">
+            <a:pPr marL="0" indent="0" algn="ctr">
               <a:buNone/>
             </a:pPr>
             <a:r>
@@ -7842,7 +7875,7 @@
           <a:bodyPr wrap="square" lIns="0" tIns="0" rIns="0" bIns="0" rtlCol="0" anchor="ctr"/>
           <a:lstStyle/>
           <a:p>
-            <a:pPr indent="0" marL="0">
+            <a:pPr marL="0" indent="0">
               <a:buNone/>
             </a:pPr>
             <a:r>
@@ -7886,13 +7919,20 @@
             <a:prstDash val="solid"/>
           </a:ln>
           <a:effectLst>
-            <a:outerShdw sx="100000" sy="100000" kx="0" ky="0" algn="bl" rotWithShape="0" blurRad="76200" dist="25400" dir="5400000">
+            <a:outerShdw blurRad="76200" dist="25400" dir="5400000" algn="bl" rotWithShape="0">
               <a:srgbClr val="000000">
                 <a:alpha val="8000"/>
               </a:srgbClr>
             </a:outerShdw>
           </a:effectLst>
         </p:spPr>
+        <p:txBody>
+          <a:bodyPr/>
+          <a:lstStyle/>
+          <a:p>
+            <a:endParaRPr lang="en-GB"/>
+          </a:p>
+        </p:txBody>
       </p:sp>
       <p:sp>
         <p:nvSpPr>
@@ -7915,7 +7955,7 @@
           <a:bodyPr wrap="square" lIns="0" tIns="0" rIns="0" bIns="0" rtlCol="0" anchor="ctr"/>
           <a:lstStyle/>
           <a:p>
-            <a:pPr indent="0" marL="0">
+            <a:pPr marL="0" indent="0">
               <a:buNone/>
             </a:pPr>
             <a:r>
@@ -8086,13 +8126,20 @@
             <a:prstDash val="solid"/>
           </a:ln>
           <a:effectLst>
-            <a:outerShdw sx="100000" sy="100000" kx="0" ky="0" algn="bl" rotWithShape="0" blurRad="76200" dist="25400" dir="5400000">
+            <a:outerShdw blurRad="76200" dist="25400" dir="5400000" algn="bl" rotWithShape="0">
               <a:srgbClr val="000000">
                 <a:alpha val="8000"/>
               </a:srgbClr>
             </a:outerShdw>
           </a:effectLst>
         </p:spPr>
+        <p:txBody>
+          <a:bodyPr/>
+          <a:lstStyle/>
+          <a:p>
+            <a:endParaRPr lang="en-GB"/>
+          </a:p>
+        </p:txBody>
       </p:sp>
       <p:sp>
         <p:nvSpPr>
@@ -8115,7 +8162,7 @@
           <a:bodyPr wrap="square" lIns="0" tIns="0" rIns="0" bIns="0" rtlCol="0" anchor="ctr"/>
           <a:lstStyle/>
           <a:p>
-            <a:pPr indent="0" marL="0">
+            <a:pPr marL="0" indent="0">
               <a:buNone/>
             </a:pPr>
             <a:r>
@@ -8286,13 +8333,20 @@
             <a:prstDash val="solid"/>
           </a:ln>
           <a:effectLst>
-            <a:outerShdw sx="100000" sy="100000" kx="0" ky="0" algn="bl" rotWithShape="0" blurRad="76200" dist="25400" dir="5400000">
+            <a:outerShdw blurRad="76200" dist="25400" dir="5400000" algn="bl" rotWithShape="0">
               <a:srgbClr val="000000">
                 <a:alpha val="8000"/>
               </a:srgbClr>
             </a:outerShdw>
           </a:effectLst>
         </p:spPr>
+        <p:txBody>
+          <a:bodyPr/>
+          <a:lstStyle/>
+          <a:p>
+            <a:endParaRPr lang="en-GB"/>
+          </a:p>
+        </p:txBody>
       </p:sp>
       <p:sp>
         <p:nvSpPr>
@@ -8315,7 +8369,7 @@
           <a:bodyPr wrap="square" lIns="0" tIns="0" rIns="0" bIns="0" rtlCol="0" anchor="ctr"/>
           <a:lstStyle/>
           <a:p>
-            <a:pPr indent="0" marL="0">
+            <a:pPr marL="0" indent="0">
               <a:buNone/>
             </a:pPr>
             <a:r>
@@ -8439,7 +8493,7 @@
           <a:bodyPr wrap="square" lIns="0" tIns="0" rIns="0" bIns="0" rtlCol="0" anchor="ctr"/>
           <a:lstStyle/>
           <a:p>
-            <a:pPr indent="0" marL="0">
+            <a:pPr marL="0" indent="0">
               <a:buNone/>
             </a:pPr>
             <a:r>
@@ -8473,6 +8527,7 @@
         <a:solidFill>
           <a:srgbClr val="F6F6F8"/>
         </a:solidFill>
+        <a:effectLst/>
       </p:bgPr>
     </p:bg>
     <p:spTree>
@@ -8513,6 +8568,13 @@
             <a:prstDash val="solid"/>
           </a:ln>
         </p:spPr>
+        <p:txBody>
+          <a:bodyPr/>
+          <a:lstStyle/>
+          <a:p>
+            <a:endParaRPr lang="en-GB"/>
+          </a:p>
+        </p:txBody>
       </p:sp>
       <p:sp>
         <p:nvSpPr>
@@ -8535,7 +8597,7 @@
           <a:bodyPr wrap="square" lIns="0" tIns="0" rIns="0" bIns="0" rtlCol="0" anchor="ctr"/>
           <a:lstStyle/>
           <a:p>
-            <a:pPr algn="ctr" indent="0" marL="0">
+            <a:pPr marL="0" indent="0" algn="ctr">
               <a:buNone/>
             </a:pPr>
             <a:r>
@@ -8574,7 +8636,7 @@
           <a:bodyPr wrap="square" lIns="0" tIns="0" rIns="0" bIns="0" rtlCol="0" anchor="ctr"/>
           <a:lstStyle/>
           <a:p>
-            <a:pPr indent="0" marL="0">
+            <a:pPr marL="0" indent="0">
               <a:buNone/>
             </a:pPr>
             <a:r>
@@ -8613,7 +8675,7 @@
           <a:bodyPr wrap="square" lIns="0" tIns="0" rIns="0" bIns="0" rtlCol="0" anchor="ctr"/>
           <a:lstStyle/>
           <a:p>
-            <a:pPr algn="ctr" indent="0" marL="0">
+            <a:pPr marL="0" indent="0" algn="ctr">
               <a:buNone/>
             </a:pPr>
             <a:r>
@@ -8652,7 +8714,7 @@
           <a:bodyPr wrap="square" lIns="0" tIns="0" rIns="0" bIns="0" rtlCol="0" anchor="ctr"/>
           <a:lstStyle/>
           <a:p>
-            <a:pPr algn="ctr" indent="0" marL="0">
+            <a:pPr marL="0" indent="0" algn="ctr">
               <a:buNone/>
             </a:pPr>
             <a:r>
@@ -8691,7 +8753,7 @@
           <a:bodyPr wrap="square" lIns="0" tIns="0" rIns="0" bIns="0" rtlCol="0" anchor="ctr"/>
           <a:lstStyle/>
           <a:p>
-            <a:pPr algn="ctr" indent="0" marL="0">
+            <a:pPr marL="0" indent="0" algn="ctr">
               <a:buNone/>
             </a:pPr>
             <a:r>
@@ -8730,7 +8792,7 @@
           <a:bodyPr wrap="square" lIns="0" tIns="0" rIns="0" bIns="0" rtlCol="0" anchor="ctr"/>
           <a:lstStyle/>
           <a:p>
-            <a:pPr algn="ctr" indent="0" marL="0">
+            <a:pPr marL="0" indent="0" algn="ctr">
               <a:buNone/>
             </a:pPr>
             <a:r>
@@ -8769,7 +8831,7 @@
           <a:bodyPr wrap="square" lIns="0" tIns="0" rIns="0" bIns="0" rtlCol="0" anchor="ctr"/>
           <a:lstStyle/>
           <a:p>
-            <a:pPr algn="ctr" indent="0" marL="0">
+            <a:pPr marL="0" indent="0" algn="ctr">
               <a:buNone/>
             </a:pPr>
             <a:r>
@@ -8808,7 +8870,7 @@
           <a:bodyPr wrap="square" lIns="0" tIns="0" rIns="0" bIns="0" rtlCol="0" anchor="ctr"/>
           <a:lstStyle/>
           <a:p>
-            <a:pPr algn="ctr" indent="0" marL="0">
+            <a:pPr marL="0" indent="0" algn="ctr">
               <a:buNone/>
             </a:pPr>
             <a:r>
@@ -8847,7 +8909,7 @@
           <a:bodyPr wrap="square" lIns="0" tIns="0" rIns="0" bIns="0" rtlCol="0" anchor="ctr"/>
           <a:lstStyle/>
           <a:p>
-            <a:pPr algn="ctr" indent="0" marL="0">
+            <a:pPr marL="0" indent="0" algn="ctr">
               <a:buNone/>
             </a:pPr>
             <a:r>
@@ -8886,7 +8948,7 @@
           <a:bodyPr wrap="square" lIns="0" tIns="0" rIns="0" bIns="0" rtlCol="0" anchor="ctr"/>
           <a:lstStyle/>
           <a:p>
-            <a:pPr algn="ctr" indent="0" marL="0">
+            <a:pPr marL="0" indent="0" algn="ctr">
               <a:buNone/>
             </a:pPr>
             <a:r>
@@ -8906,15 +8968,15 @@
       </p:sp>
       <p:pic>
         <p:nvPicPr>
-          <p:cNvPr id="13" name="Image 0" descr="/home/claude/deck/pr_f.png">    </p:cNvPr>
+          <p:cNvPr id="13" name="Image 0" descr="/home/claude/deck/pr_f.png"/>
           <p:cNvPicPr>
             <a:picLocks noChangeAspect="1"/>
           </p:cNvPicPr>
           <p:nvPr/>
         </p:nvPicPr>
         <p:blipFill>
-          <a:blip r:embed="rId1"/>
-          <a:srcRect l="0" r="0" t="0" b="0"/>
+          <a:blip r:embed="rId3"/>
+          <a:srcRect/>
           <a:stretch/>
         </p:blipFill>
         <p:spPr>
@@ -8929,15 +8991,15 @@
       </p:pic>
       <p:pic>
         <p:nvPicPr>
-          <p:cNvPr id="14" name="Image 1" descr="/home/claude/deck/cm_f.png">    </p:cNvPr>
+          <p:cNvPr id="14" name="Image 1" descr="/home/claude/deck/cm_f.png"/>
           <p:cNvPicPr>
             <a:picLocks noChangeAspect="1"/>
           </p:cNvPicPr>
           <p:nvPr/>
         </p:nvPicPr>
         <p:blipFill>
-          <a:blip r:embed="rId2"/>
-          <a:srcRect l="0" r="0" t="0" b="0"/>
+          <a:blip r:embed="rId4"/>
+          <a:srcRect/>
           <a:stretch/>
         </p:blipFill>
         <p:spPr>
@@ -8971,7 +9033,7 @@
           <a:bodyPr wrap="square" lIns="0" tIns="0" rIns="0" bIns="0" rtlCol="0" anchor="ctr"/>
           <a:lstStyle/>
           <a:p>
-            <a:pPr indent="0" marL="0">
+            <a:pPr marL="0" indent="0">
               <a:buNone/>
             </a:pPr>
             <a:r>
@@ -9005,6 +9067,7 @@
         <a:solidFill>
           <a:srgbClr val="F6F6F8"/>
         </a:solidFill>
+        <a:effectLst/>
       </p:bgPr>
     </p:bg>
     <p:spTree>
@@ -9045,6 +9108,13 @@
             <a:prstDash val="solid"/>
           </a:ln>
         </p:spPr>
+        <p:txBody>
+          <a:bodyPr/>
+          <a:lstStyle/>
+          <a:p>
+            <a:endParaRPr lang="en-GB"/>
+          </a:p>
+        </p:txBody>
       </p:sp>
       <p:sp>
         <p:nvSpPr>
@@ -9067,7 +9137,7 @@
           <a:bodyPr wrap="square" lIns="0" tIns="0" rIns="0" bIns="0" rtlCol="0" anchor="ctr"/>
           <a:lstStyle/>
           <a:p>
-            <a:pPr algn="ctr" indent="0" marL="0">
+            <a:pPr marL="0" indent="0" algn="ctr">
               <a:buNone/>
             </a:pPr>
             <a:r>
@@ -9106,7 +9176,7 @@
           <a:bodyPr wrap="square" lIns="0" tIns="0" rIns="0" bIns="0" rtlCol="0" anchor="ctr"/>
           <a:lstStyle/>
           <a:p>
-            <a:pPr indent="0" marL="0">
+            <a:pPr marL="0" indent="0">
               <a:buNone/>
             </a:pPr>
             <a:r>
@@ -9126,15 +9196,15 @@
       </p:sp>
       <p:pic>
         <p:nvPicPr>
-          <p:cNvPr id="5" name="Image 0" descr="/home/claude/deck/q1b_f.png">    </p:cNvPr>
+          <p:cNvPr id="5" name="Image 0" descr="/home/claude/deck/q1b_f.png"/>
           <p:cNvPicPr>
             <a:picLocks noChangeAspect="1"/>
           </p:cNvPicPr>
           <p:nvPr/>
         </p:nvPicPr>
         <p:blipFill>
-          <a:blip r:embed="rId1"/>
-          <a:srcRect l="0" r="0" t="0" b="0"/>
+          <a:blip r:embed="rId3"/>
+          <a:srcRect/>
           <a:stretch/>
         </p:blipFill>
         <p:spPr>
@@ -9156,7 +9226,7 @@
         <p:spPr>
           <a:xfrm>
             <a:off x="457200" y="2926080"/>
-            <a:ext cx="3931920" cy="1691640"/>
+            <a:ext cx="3931920" cy="1851660"/>
           </a:xfrm>
           <a:prstGeom prst="roundRect">
             <a:avLst>
@@ -9173,13 +9243,20 @@
             <a:prstDash val="solid"/>
           </a:ln>
           <a:effectLst>
-            <a:outerShdw sx="100000" sy="100000" kx="0" ky="0" algn="bl" rotWithShape="0" blurRad="76200" dist="25400" dir="5400000">
+            <a:outerShdw blurRad="76200" dist="25400" dir="5400000" algn="bl" rotWithShape="0">
               <a:srgbClr val="000000">
                 <a:alpha val="8000"/>
               </a:srgbClr>
             </a:outerShdw>
           </a:effectLst>
         </p:spPr>
+        <p:txBody>
+          <a:bodyPr/>
+          <a:lstStyle/>
+          <a:p>
+            <a:endParaRPr lang="en-GB"/>
+          </a:p>
+        </p:txBody>
       </p:sp>
       <p:sp>
         <p:nvSpPr>
@@ -9202,7 +9279,7 @@
           <a:bodyPr wrap="square" lIns="0" tIns="0" rIns="0" bIns="0" rtlCol="0" anchor="ctr"/>
           <a:lstStyle/>
           <a:p>
-            <a:pPr indent="0" marL="0">
+            <a:pPr marL="0" indent="0">
               <a:buNone/>
             </a:pPr>
             <a:r>
@@ -9307,21 +9384,21 @@
       </p:sp>
       <p:pic>
         <p:nvPicPr>
-          <p:cNvPr id="9" name="Image 1" descr="/home/claude/deck/q1c_f.png">    </p:cNvPr>
+          <p:cNvPr id="9" name="Image 1" descr="/home/claude/deck/q1c_f.png"/>
           <p:cNvPicPr>
             <a:picLocks noChangeAspect="1"/>
           </p:cNvPicPr>
           <p:nvPr/>
         </p:nvPicPr>
         <p:blipFill>
-          <a:blip r:embed="rId2"/>
-          <a:srcRect l="0" r="0" t="0" b="0"/>
+          <a:blip r:embed="rId4"/>
+          <a:srcRect/>
           <a:stretch/>
         </p:blipFill>
         <p:spPr>
           <a:xfrm>
             <a:off x="4572000" y="2880360"/>
-            <a:ext cx="4114800" cy="1783080"/>
+            <a:ext cx="4114800" cy="1897380"/>
           </a:xfrm>
           <a:prstGeom prst="rect">
             <a:avLst/>
@@ -9349,7 +9426,7 @@
           <a:bodyPr wrap="square" lIns="0" tIns="0" rIns="0" bIns="0" rtlCol="0" anchor="ctr"/>
           <a:lstStyle/>
           <a:p>
-            <a:pPr indent="0" marL="0">
+            <a:pPr marL="0" indent="0">
               <a:buNone/>
             </a:pPr>
             <a:r>
@@ -9383,6 +9460,7 @@
         <a:solidFill>
           <a:srgbClr val="F6F6F8"/>
         </a:solidFill>
+        <a:effectLst/>
       </p:bgPr>
     </p:bg>
     <p:spTree>
@@ -9423,6 +9501,13 @@
             <a:prstDash val="solid"/>
           </a:ln>
         </p:spPr>
+        <p:txBody>
+          <a:bodyPr/>
+          <a:lstStyle/>
+          <a:p>
+            <a:endParaRPr lang="en-GB"/>
+          </a:p>
+        </p:txBody>
       </p:sp>
       <p:sp>
         <p:nvSpPr>
@@ -9445,7 +9530,7 @@
           <a:bodyPr wrap="square" lIns="0" tIns="0" rIns="0" bIns="0" rtlCol="0" anchor="ctr"/>
           <a:lstStyle/>
           <a:p>
-            <a:pPr algn="ctr" indent="0" marL="0">
+            <a:pPr marL="0" indent="0" algn="ctr">
               <a:buNone/>
             </a:pPr>
             <a:r>
@@ -9484,7 +9569,7 @@
           <a:bodyPr wrap="square" lIns="0" tIns="0" rIns="0" bIns="0" rtlCol="0" anchor="ctr"/>
           <a:lstStyle/>
           <a:p>
-            <a:pPr indent="0" marL="0">
+            <a:pPr marL="0" indent="0">
               <a:buNone/>
             </a:pPr>
             <a:r>
@@ -9528,13 +9613,20 @@
             <a:prstDash val="solid"/>
           </a:ln>
           <a:effectLst>
-            <a:outerShdw sx="100000" sy="100000" kx="0" ky="0" algn="bl" rotWithShape="0" blurRad="76200" dist="25400" dir="5400000">
+            <a:outerShdw blurRad="76200" dist="25400" dir="5400000" algn="bl" rotWithShape="0">
               <a:srgbClr val="000000">
                 <a:alpha val="8000"/>
               </a:srgbClr>
             </a:outerShdw>
           </a:effectLst>
         </p:spPr>
+        <p:txBody>
+          <a:bodyPr/>
+          <a:lstStyle/>
+          <a:p>
+            <a:endParaRPr lang="en-GB"/>
+          </a:p>
+        </p:txBody>
       </p:sp>
       <p:sp>
         <p:nvSpPr>
@@ -9557,7 +9649,7 @@
           <a:bodyPr wrap="square" lIns="0" tIns="0" rIns="0" bIns="0" rtlCol="0" anchor="ctr"/>
           <a:lstStyle/>
           <a:p>
-            <a:pPr indent="0" marL="0">
+            <a:pPr marL="0" indent="0">
               <a:buNone/>
             </a:pPr>
             <a:r>
@@ -9665,13 +9757,20 @@
             <a:prstDash val="solid"/>
           </a:ln>
           <a:effectLst>
-            <a:outerShdw sx="100000" sy="100000" kx="0" ky="0" algn="bl" rotWithShape="0" blurRad="76200" dist="25400" dir="5400000">
+            <a:outerShdw blurRad="76200" dist="25400" dir="5400000" algn="bl" rotWithShape="0">
               <a:srgbClr val="000000">
                 <a:alpha val="8000"/>
               </a:srgbClr>
             </a:outerShdw>
           </a:effectLst>
         </p:spPr>
+        <p:txBody>
+          <a:bodyPr/>
+          <a:lstStyle/>
+          <a:p>
+            <a:endParaRPr lang="en-GB"/>
+          </a:p>
+        </p:txBody>
       </p:sp>
       <p:sp>
         <p:nvSpPr>
@@ -9694,7 +9793,7 @@
           <a:bodyPr wrap="square" lIns="0" tIns="0" rIns="0" bIns="0" rtlCol="0" anchor="ctr"/>
           <a:lstStyle/>
           <a:p>
-            <a:pPr indent="0" marL="0">
+            <a:pPr marL="0" indent="0">
               <a:buNone/>
             </a:pPr>
             <a:r>
@@ -9820,15 +9919,15 @@
       </p:sp>
       <p:pic>
         <p:nvPicPr>
-          <p:cNvPr id="11" name="Image 0" descr="/home/claude/deck/traj_f.png">    </p:cNvPr>
+          <p:cNvPr id="11" name="Image 0" descr="/home/claude/deck/traj_f.png"/>
           <p:cNvPicPr>
             <a:picLocks noChangeAspect="1"/>
           </p:cNvPicPr>
           <p:nvPr/>
         </p:nvPicPr>
         <p:blipFill>
-          <a:blip r:embed="rId1"/>
-          <a:srcRect l="0" r="0" t="0" b="0"/>
+          <a:blip r:embed="rId3"/>
+          <a:srcRect/>
           <a:stretch/>
         </p:blipFill>
         <p:spPr>
@@ -9862,7 +9961,7 @@
           <a:bodyPr wrap="square" lIns="0" tIns="0" rIns="0" bIns="0" rtlCol="0" anchor="ctr"/>
           <a:lstStyle/>
           <a:p>
-            <a:pPr indent="0" marL="0">
+            <a:pPr marL="0" indent="0">
               <a:buNone/>
             </a:pPr>
             <a:r>
@@ -9896,6 +9995,7 @@
         <a:solidFill>
           <a:srgbClr val="F6F6F8"/>
         </a:solidFill>
+        <a:effectLst/>
       </p:bgPr>
     </p:bg>
     <p:spTree>
@@ -9936,6 +10036,13 @@
             <a:prstDash val="solid"/>
           </a:ln>
         </p:spPr>
+        <p:txBody>
+          <a:bodyPr/>
+          <a:lstStyle/>
+          <a:p>
+            <a:endParaRPr lang="en-GB"/>
+          </a:p>
+        </p:txBody>
       </p:sp>
       <p:sp>
         <p:nvSpPr>
@@ -9958,7 +10065,7 @@
           <a:bodyPr wrap="square" lIns="0" tIns="0" rIns="0" bIns="0" rtlCol="0" anchor="ctr"/>
           <a:lstStyle/>
           <a:p>
-            <a:pPr algn="ctr" indent="0" marL="0">
+            <a:pPr marL="0" indent="0" algn="ctr">
               <a:buNone/>
             </a:pPr>
             <a:r>
@@ -9997,7 +10104,7 @@
           <a:bodyPr wrap="square" lIns="0" tIns="0" rIns="0" bIns="0" rtlCol="0" anchor="ctr"/>
           <a:lstStyle/>
           <a:p>
-            <a:pPr indent="0" marL="0">
+            <a:pPr marL="0" indent="0">
               <a:buNone/>
             </a:pPr>
             <a:r>
@@ -10041,13 +10148,20 @@
             <a:prstDash val="solid"/>
           </a:ln>
           <a:effectLst>
-            <a:outerShdw sx="100000" sy="100000" kx="0" ky="0" algn="bl" rotWithShape="0" blurRad="76200" dist="25400" dir="5400000">
+            <a:outerShdw blurRad="76200" dist="25400" dir="5400000" algn="bl" rotWithShape="0">
               <a:srgbClr val="000000">
                 <a:alpha val="8000"/>
               </a:srgbClr>
             </a:outerShdw>
           </a:effectLst>
         </p:spPr>
+        <p:txBody>
+          <a:bodyPr/>
+          <a:lstStyle/>
+          <a:p>
+            <a:endParaRPr lang="en-GB"/>
+          </a:p>
+        </p:txBody>
       </p:sp>
       <p:sp>
         <p:nvSpPr>
@@ -10070,7 +10184,7 @@
           <a:bodyPr wrap="square" lIns="0" tIns="0" rIns="0" bIns="0" rtlCol="0" anchor="ctr"/>
           <a:lstStyle/>
           <a:p>
-            <a:pPr indent="0" marL="0">
+            <a:pPr marL="0" indent="0">
               <a:buNone/>
             </a:pPr>
             <a:r>
@@ -10199,13 +10313,20 @@
             <a:prstDash val="solid"/>
           </a:ln>
           <a:effectLst>
-            <a:outerShdw sx="100000" sy="100000" kx="0" ky="0" algn="bl" rotWithShape="0" blurRad="76200" dist="25400" dir="5400000">
+            <a:outerShdw blurRad="76200" dist="25400" dir="5400000" algn="bl" rotWithShape="0">
               <a:srgbClr val="000000">
                 <a:alpha val="8000"/>
               </a:srgbClr>
             </a:outerShdw>
           </a:effectLst>
         </p:spPr>
+        <p:txBody>
+          <a:bodyPr/>
+          <a:lstStyle/>
+          <a:p>
+            <a:endParaRPr lang="en-GB"/>
+          </a:p>
+        </p:txBody>
       </p:sp>
       <p:sp>
         <p:nvSpPr>
@@ -10228,7 +10349,7 @@
           <a:bodyPr wrap="square" lIns="0" tIns="0" rIns="0" bIns="0" rtlCol="0" anchor="ctr"/>
           <a:lstStyle/>
           <a:p>
-            <a:pPr indent="0" marL="0">
+            <a:pPr marL="0" indent="0">
               <a:buNone/>
             </a:pPr>
             <a:r>
@@ -10352,7 +10473,7 @@
           <a:bodyPr wrap="square" lIns="0" tIns="0" rIns="0" bIns="0" rtlCol="0" anchor="ctr"/>
           <a:lstStyle/>
           <a:p>
-            <a:pPr indent="0" marL="0">
+            <a:pPr marL="0" indent="0">
               <a:buNone/>
             </a:pPr>
             <a:r>
@@ -10396,6 +10517,13 @@
             <a:prstDash val="solid"/>
           </a:ln>
         </p:spPr>
+        <p:txBody>
+          <a:bodyPr/>
+          <a:lstStyle/>
+          <a:p>
+            <a:endParaRPr lang="en-GB"/>
+          </a:p>
+        </p:txBody>
       </p:sp>
       <p:sp>
         <p:nvSpPr>
@@ -10418,7 +10546,7 @@
           <a:bodyPr wrap="square" lIns="635" tIns="635" rIns="635" bIns="635" rtlCol="0" anchor="ctr"/>
           <a:lstStyle/>
           <a:p>
-            <a:pPr algn="ctr" indent="0" marL="0">
+            <a:pPr marL="0" indent="0" algn="ctr">
               <a:buNone/>
             </a:pPr>
             <a:r>
@@ -10435,7 +10563,7 @@
             <a:endParaRPr lang="en-US" sz="1100" dirty="0"/>
           </a:p>
           <a:p>
-            <a:pPr algn="ctr" indent="0" marL="0">
+            <a:pPr marL="0" indent="0" algn="ctr">
               <a:buNone/>
             </a:pPr>
             <a:r>
@@ -10474,7 +10602,7 @@
           <a:bodyPr wrap="square" lIns="0" tIns="0" rIns="0" bIns="0" rtlCol="0" anchor="ctr"/>
           <a:lstStyle/>
           <a:p>
-            <a:pPr algn="ctr" indent="0" marL="0">
+            <a:pPr marL="0" indent="0" algn="ctr">
               <a:buNone/>
             </a:pPr>
             <a:r>
@@ -10515,6 +10643,13 @@
             <a:prstDash val="solid"/>
           </a:ln>
         </p:spPr>
+        <p:txBody>
+          <a:bodyPr/>
+          <a:lstStyle/>
+          <a:p>
+            <a:endParaRPr lang="en-GB"/>
+          </a:p>
+        </p:txBody>
       </p:sp>
       <p:sp>
         <p:nvSpPr>
@@ -10537,7 +10672,7 @@
           <a:bodyPr wrap="square" lIns="635" tIns="635" rIns="635" bIns="635" rtlCol="0" anchor="ctr"/>
           <a:lstStyle/>
           <a:p>
-            <a:pPr algn="ctr" indent="0" marL="0">
+            <a:pPr marL="0" indent="0" algn="ctr">
               <a:buNone/>
             </a:pPr>
             <a:r>
@@ -10554,7 +10689,7 @@
             <a:endParaRPr lang="en-US" sz="1100" dirty="0"/>
           </a:p>
           <a:p>
-            <a:pPr algn="ctr" indent="0" marL="0">
+            <a:pPr marL="0" indent="0" algn="ctr">
               <a:buNone/>
             </a:pPr>
             <a:r>
@@ -10593,7 +10728,7 @@
           <a:bodyPr wrap="square" lIns="0" tIns="0" rIns="0" bIns="0" rtlCol="0" anchor="ctr"/>
           <a:lstStyle/>
           <a:p>
-            <a:pPr algn="ctr" indent="0" marL="0">
+            <a:pPr marL="0" indent="0" algn="ctr">
               <a:buNone/>
             </a:pPr>
             <a:r>
@@ -10634,6 +10769,13 @@
             <a:prstDash val="solid"/>
           </a:ln>
         </p:spPr>
+        <p:txBody>
+          <a:bodyPr/>
+          <a:lstStyle/>
+          <a:p>
+            <a:endParaRPr lang="en-GB"/>
+          </a:p>
+        </p:txBody>
       </p:sp>
       <p:sp>
         <p:nvSpPr>
@@ -10656,7 +10798,7 @@
           <a:bodyPr wrap="square" lIns="635" tIns="635" rIns="635" bIns="635" rtlCol="0" anchor="ctr"/>
           <a:lstStyle/>
           <a:p>
-            <a:pPr algn="ctr" indent="0" marL="0">
+            <a:pPr marL="0" indent="0" algn="ctr">
               <a:buNone/>
             </a:pPr>
             <a:r>
@@ -10673,7 +10815,7 @@
             <a:endParaRPr lang="en-US" sz="1100" dirty="0"/>
           </a:p>
           <a:p>
-            <a:pPr algn="ctr" indent="0" marL="0">
+            <a:pPr marL="0" indent="0" algn="ctr">
               <a:buNone/>
             </a:pPr>
             <a:r>
@@ -10712,7 +10854,7 @@
           <a:bodyPr wrap="square" lIns="0" tIns="0" rIns="0" bIns="0" rtlCol="0" anchor="ctr"/>
           <a:lstStyle/>
           <a:p>
-            <a:pPr algn="ctr" indent="0" marL="0">
+            <a:pPr marL="0" indent="0" algn="ctr">
               <a:buNone/>
             </a:pPr>
             <a:r>
@@ -10753,6 +10895,13 @@
             <a:prstDash val="solid"/>
           </a:ln>
         </p:spPr>
+        <p:txBody>
+          <a:bodyPr/>
+          <a:lstStyle/>
+          <a:p>
+            <a:endParaRPr lang="en-GB"/>
+          </a:p>
+        </p:txBody>
       </p:sp>
       <p:sp>
         <p:nvSpPr>
@@ -10775,7 +10924,7 @@
           <a:bodyPr wrap="square" lIns="635" tIns="635" rIns="635" bIns="635" rtlCol="0" anchor="ctr"/>
           <a:lstStyle/>
           <a:p>
-            <a:pPr algn="ctr" indent="0" marL="0">
+            <a:pPr marL="0" indent="0" algn="ctr">
               <a:buNone/>
             </a:pPr>
             <a:r>
@@ -10792,7 +10941,7 @@
             <a:endParaRPr lang="en-US" sz="1100" dirty="0"/>
           </a:p>
           <a:p>
-            <a:pPr algn="ctr" indent="0" marL="0">
+            <a:pPr marL="0" indent="0" algn="ctr">
               <a:buNone/>
             </a:pPr>
             <a:r>
@@ -10831,7 +10980,7 @@
           <a:bodyPr wrap="square" lIns="0" tIns="0" rIns="0" bIns="0" rtlCol="0" anchor="ctr"/>
           <a:lstStyle/>
           <a:p>
-            <a:pPr algn="ctr" indent="0" marL="0">
+            <a:pPr marL="0" indent="0" algn="ctr">
               <a:buNone/>
             </a:pPr>
             <a:r>
@@ -10872,6 +11021,13 @@
             <a:prstDash val="solid"/>
           </a:ln>
         </p:spPr>
+        <p:txBody>
+          <a:bodyPr/>
+          <a:lstStyle/>
+          <a:p>
+            <a:endParaRPr lang="en-GB"/>
+          </a:p>
+        </p:txBody>
       </p:sp>
       <p:sp>
         <p:nvSpPr>
@@ -10894,7 +11050,7 @@
           <a:bodyPr wrap="square" lIns="635" tIns="635" rIns="635" bIns="635" rtlCol="0" anchor="ctr"/>
           <a:lstStyle/>
           <a:p>
-            <a:pPr algn="ctr" indent="0" marL="0">
+            <a:pPr marL="0" indent="0" algn="ctr">
               <a:buNone/>
             </a:pPr>
             <a:r>
@@ -10911,7 +11067,7 @@
             <a:endParaRPr lang="en-US" sz="1100" dirty="0"/>
           </a:p>
           <a:p>
-            <a:pPr algn="ctr" indent="0" marL="0">
+            <a:pPr marL="0" indent="0" algn="ctr">
               <a:buNone/>
             </a:pPr>
             <a:r>
@@ -10950,7 +11106,7 @@
           <a:bodyPr wrap="square" lIns="0" tIns="0" rIns="0" bIns="0" rtlCol="0" anchor="ctr"/>
           <a:lstStyle/>
           <a:p>
-            <a:pPr indent="0" marL="0">
+            <a:pPr marL="0" indent="0">
               <a:buNone/>
             </a:pPr>
             <a:r>
@@ -10984,6 +11140,7 @@
         <a:solidFill>
           <a:srgbClr val="F6F6F8"/>
         </a:solidFill>
+        <a:effectLst/>
       </p:bgPr>
     </p:bg>
     <p:spTree>
@@ -11024,6 +11181,13 @@
             <a:prstDash val="solid"/>
           </a:ln>
         </p:spPr>
+        <p:txBody>
+          <a:bodyPr/>
+          <a:lstStyle/>
+          <a:p>
+            <a:endParaRPr lang="en-GB"/>
+          </a:p>
+        </p:txBody>
       </p:sp>
       <p:sp>
         <p:nvSpPr>
@@ -11046,7 +11210,7 @@
           <a:bodyPr wrap="square" lIns="0" tIns="0" rIns="0" bIns="0" rtlCol="0" anchor="ctr"/>
           <a:lstStyle/>
           <a:p>
-            <a:pPr algn="ctr" indent="0" marL="0">
+            <a:pPr marL="0" indent="0" algn="ctr">
               <a:buNone/>
             </a:pPr>
             <a:r>
@@ -11085,7 +11249,7 @@
           <a:bodyPr wrap="square" lIns="0" tIns="0" rIns="0" bIns="0" rtlCol="0" anchor="ctr"/>
           <a:lstStyle/>
           <a:p>
-            <a:pPr indent="0" marL="0">
+            <a:pPr marL="0" indent="0">
               <a:buNone/>
             </a:pPr>
             <a:r>
@@ -11105,15 +11269,15 @@
       </p:sp>
       <p:pic>
         <p:nvPicPr>
-          <p:cNvPr id="5" name="Image 0" descr="/home/claude/deck/q3a_f.png">    </p:cNvPr>
+          <p:cNvPr id="5" name="Image 0" descr="/home/claude/deck/q3a_f.png"/>
           <p:cNvPicPr>
             <a:picLocks noChangeAspect="1"/>
           </p:cNvPicPr>
           <p:nvPr/>
         </p:nvPicPr>
         <p:blipFill>
-          <a:blip r:embed="rId1"/>
-          <a:srcRect l="0" r="0" t="0" b="0"/>
+          <a:blip r:embed="rId3"/>
+          <a:srcRect/>
           <a:stretch/>
         </p:blipFill>
         <p:spPr>
@@ -11128,15 +11292,15 @@
       </p:pic>
       <p:pic>
         <p:nvPicPr>
-          <p:cNvPr id="6" name="Image 1" descr="/home/claude/deck/q3b_f.png">    </p:cNvPr>
+          <p:cNvPr id="6" name="Image 1" descr="/home/claude/deck/q3b_f.png"/>
           <p:cNvPicPr>
             <a:picLocks noChangeAspect="1"/>
           </p:cNvPicPr>
           <p:nvPr/>
         </p:nvPicPr>
         <p:blipFill>
-          <a:blip r:embed="rId2"/>
-          <a:srcRect l="0" r="0" t="0" b="0"/>
+          <a:blip r:embed="rId4"/>
+          <a:srcRect/>
           <a:stretch/>
         </p:blipFill>
         <p:spPr>
@@ -11170,7 +11334,7 @@
           <a:bodyPr wrap="square" lIns="0" tIns="0" rIns="0" bIns="0" rtlCol="0" anchor="ctr"/>
           <a:lstStyle/>
           <a:p>
-            <a:pPr indent="0" marL="0">
+            <a:pPr marL="0" indent="0">
               <a:buNone/>
             </a:pPr>
             <a:r>
@@ -11209,7 +11373,7 @@
           <a:bodyPr wrap="square" lIns="0" tIns="0" rIns="0" bIns="0" rtlCol="0" anchor="ctr"/>
           <a:lstStyle/>
           <a:p>
-            <a:pPr algn="ctr" indent="0" marL="0">
+            <a:pPr marL="0" indent="0" algn="ctr">
               <a:buNone/>
             </a:pPr>
             <a:r>
@@ -11248,7 +11412,7 @@
           <a:bodyPr wrap="square" lIns="0" tIns="0" rIns="0" bIns="0" rtlCol="0" anchor="ctr"/>
           <a:lstStyle/>
           <a:p>
-            <a:pPr algn="ctr" indent="0" marL="0">
+            <a:pPr marL="0" indent="0" algn="ctr">
               <a:buNone/>
             </a:pPr>
             <a:r>
@@ -11287,7 +11451,7 @@
           <a:bodyPr wrap="square" lIns="0" tIns="0" rIns="0" bIns="0" rtlCol="0" anchor="ctr"/>
           <a:lstStyle/>
           <a:p>
-            <a:pPr algn="ctr" indent="0" marL="0">
+            <a:pPr marL="0" indent="0" algn="ctr">
               <a:buNone/>
             </a:pPr>
             <a:r>
@@ -11326,7 +11490,7 @@
           <a:bodyPr wrap="square" lIns="0" tIns="0" rIns="0" bIns="0" rtlCol="0" anchor="ctr"/>
           <a:lstStyle/>
           <a:p>
-            <a:pPr algn="ctr" indent="0" marL="0">
+            <a:pPr marL="0" indent="0" algn="ctr">
               <a:buNone/>
             </a:pPr>
             <a:r>
@@ -11365,7 +11529,7 @@
           <a:bodyPr wrap="square" lIns="0" tIns="0" rIns="0" bIns="0" rtlCol="0" anchor="ctr"/>
           <a:lstStyle/>
           <a:p>
-            <a:pPr algn="ctr" indent="0" marL="0">
+            <a:pPr marL="0" indent="0" algn="ctr">
               <a:buNone/>
             </a:pPr>
             <a:r>
@@ -11404,7 +11568,7 @@
           <a:bodyPr wrap="square" lIns="0" tIns="0" rIns="0" bIns="0" rtlCol="0" anchor="ctr"/>
           <a:lstStyle/>
           <a:p>
-            <a:pPr algn="ctr" indent="0" marL="0">
+            <a:pPr marL="0" indent="0" algn="ctr">
               <a:buNone/>
             </a:pPr>
             <a:r>
@@ -11443,7 +11607,7 @@
           <a:bodyPr wrap="square" lIns="0" tIns="0" rIns="0" bIns="0" rtlCol="0" anchor="ctr"/>
           <a:lstStyle/>
           <a:p>
-            <a:pPr indent="0" marL="0">
+            <a:pPr marL="0" indent="0">
               <a:buNone/>
             </a:pPr>
             <a:r>
@@ -11762,4 +11926,319 @@
     </a:ext>
   </a:extLst>
 </a:theme>
+</file>
+
+<file path=ppt/theme/theme2.xml><?xml version="1.0" encoding="utf-8"?>
+<a:theme xmlns:a="http://schemas.openxmlformats.org/drawingml/2006/main" name="Office Theme">
+  <a:themeElements>
+    <a:clrScheme name="Office">
+      <a:dk1>
+        <a:sysClr val="windowText" lastClr="000000"/>
+      </a:dk1>
+      <a:lt1>
+        <a:sysClr val="window" lastClr="FFFFFF"/>
+      </a:lt1>
+      <a:dk2>
+        <a:srgbClr val="0E2841"/>
+      </a:dk2>
+      <a:lt2>
+        <a:srgbClr val="E8E8E8"/>
+      </a:lt2>
+      <a:accent1>
+        <a:srgbClr val="156082"/>
+      </a:accent1>
+      <a:accent2>
+        <a:srgbClr val="E97132"/>
+      </a:accent2>
+      <a:accent3>
+        <a:srgbClr val="196B24"/>
+      </a:accent3>
+      <a:accent4>
+        <a:srgbClr val="0F9ED5"/>
+      </a:accent4>
+      <a:accent5>
+        <a:srgbClr val="A02B93"/>
+      </a:accent5>
+      <a:accent6>
+        <a:srgbClr val="4EA72E"/>
+      </a:accent6>
+      <a:hlink>
+        <a:srgbClr val="467886"/>
+      </a:hlink>
+      <a:folHlink>
+        <a:srgbClr val="96607D"/>
+      </a:folHlink>
+    </a:clrScheme>
+    <a:fontScheme name="Office">
+      <a:majorFont>
+        <a:latin typeface="Aptos Display" panose="02110004020202020204"/>
+        <a:ea typeface=""/>
+        <a:cs typeface=""/>
+        <a:font script="Jpan" typeface="游ゴシック Light"/>
+        <a:font script="Hang" typeface="맑은 고딕"/>
+        <a:font script="Hans" typeface="等线 Light"/>
+        <a:font script="Hant" typeface="新細明體"/>
+        <a:font script="Arab" typeface="Times New Roman"/>
+        <a:font script="Hebr" typeface="Times New Roman"/>
+        <a:font script="Thai" typeface="Angsana New"/>
+        <a:font script="Ethi" typeface="Nyala"/>
+        <a:font script="Beng" typeface="Vrinda"/>
+        <a:font script="Gujr" typeface="Shruti"/>
+        <a:font script="Khmr" typeface="MoolBoran"/>
+        <a:font script="Knda" typeface="Tunga"/>
+        <a:font script="Guru" typeface="Raavi"/>
+        <a:font script="Cans" typeface="Euphemia"/>
+        <a:font script="Cher" typeface="Plantagenet Cherokee"/>
+        <a:font script="Yiii" typeface="Microsoft Yi Baiti"/>
+        <a:font script="Tibt" typeface="Microsoft Himalaya"/>
+        <a:font script="Thaa" typeface="MV Boli"/>
+        <a:font script="Deva" typeface="Mangal"/>
+        <a:font script="Telu" typeface="Gautami"/>
+        <a:font script="Taml" typeface="Latha"/>
+        <a:font script="Syrc" typeface="Estrangelo Edessa"/>
+        <a:font script="Orya" typeface="Kalinga"/>
+        <a:font script="Mlym" typeface="Kartika"/>
+        <a:font script="Laoo" typeface="DokChampa"/>
+        <a:font script="Sinh" typeface="Iskoola Pota"/>
+        <a:font script="Mong" typeface="Mongolian Baiti"/>
+        <a:font script="Viet" typeface="Times New Roman"/>
+        <a:font script="Uigh" typeface="Microsoft Uighur"/>
+        <a:font script="Geor" typeface="Sylfaen"/>
+        <a:font script="Armn" typeface="Arial"/>
+        <a:font script="Bugi" typeface="Leelawadee UI"/>
+        <a:font script="Bopo" typeface="Microsoft JhengHei"/>
+        <a:font script="Java" typeface="Javanese Text"/>
+        <a:font script="Lisu" typeface="Segoe UI"/>
+        <a:font script="Mymr" typeface="Myanmar Text"/>
+        <a:font script="Nkoo" typeface="Ebrima"/>
+        <a:font script="Olck" typeface="Nirmala UI"/>
+        <a:font script="Osma" typeface="Ebrima"/>
+        <a:font script="Phag" typeface="Phagspa"/>
+        <a:font script="Syrn" typeface="Estrangelo Edessa"/>
+        <a:font script="Syrj" typeface="Estrangelo Edessa"/>
+        <a:font script="Syre" typeface="Estrangelo Edessa"/>
+        <a:font script="Sora" typeface="Nirmala UI"/>
+        <a:font script="Tale" typeface="Microsoft Tai Le"/>
+        <a:font script="Talu" typeface="Microsoft New Tai Lue"/>
+        <a:font script="Tfng" typeface="Ebrima"/>
+      </a:majorFont>
+      <a:minorFont>
+        <a:latin typeface="Aptos" panose="02110004020202020204"/>
+        <a:ea typeface=""/>
+        <a:cs typeface=""/>
+        <a:font script="Jpan" typeface="游ゴシック"/>
+        <a:font script="Hang" typeface="맑은 고딕"/>
+        <a:font script="Hans" typeface="等线"/>
+        <a:font script="Hant" typeface="新細明體"/>
+        <a:font script="Arab" typeface="Arial"/>
+        <a:font script="Hebr" typeface="Arial"/>
+        <a:font script="Thai" typeface="Cordia New"/>
+        <a:font script="Ethi" typeface="Nyala"/>
+        <a:font script="Beng" typeface="Vrinda"/>
+        <a:font script="Gujr" typeface="Shruti"/>
+        <a:font script="Khmr" typeface="DaunPenh"/>
+        <a:font script="Knda" typeface="Tunga"/>
+        <a:font script="Guru" typeface="Raavi"/>
+        <a:font script="Cans" typeface="Euphemia"/>
+        <a:font script="Cher" typeface="Plantagenet Cherokee"/>
+        <a:font script="Yiii" typeface="Microsoft Yi Baiti"/>
+        <a:font script="Tibt" typeface="Microsoft Himalaya"/>
+        <a:font script="Thaa" typeface="MV Boli"/>
+        <a:font script="Deva" typeface="Mangal"/>
+        <a:font script="Telu" typeface="Gautami"/>
+        <a:font script="Taml" typeface="Latha"/>
+        <a:font script="Syrc" typeface="Estrangelo Edessa"/>
+        <a:font script="Orya" typeface="Kalinga"/>
+        <a:font script="Mlym" typeface="Kartika"/>
+        <a:font script="Laoo" typeface="DokChampa"/>
+        <a:font script="Sinh" typeface="Iskoola Pota"/>
+        <a:font script="Mong" typeface="Mongolian Baiti"/>
+        <a:font script="Viet" typeface="Arial"/>
+        <a:font script="Uigh" typeface="Microsoft Uighur"/>
+        <a:font script="Geor" typeface="Sylfaen"/>
+        <a:font script="Armn" typeface="Arial"/>
+        <a:font script="Bugi" typeface="Leelawadee UI"/>
+        <a:font script="Bopo" typeface="Microsoft JhengHei"/>
+        <a:font script="Java" typeface="Javanese Text"/>
+        <a:font script="Lisu" typeface="Segoe UI"/>
+        <a:font script="Mymr" typeface="Myanmar Text"/>
+        <a:font script="Nkoo" typeface="Ebrima"/>
+        <a:font script="Olck" typeface="Nirmala UI"/>
+        <a:font script="Osma" typeface="Ebrima"/>
+        <a:font script="Phag" typeface="Phagspa"/>
+        <a:font script="Syrn" typeface="Estrangelo Edessa"/>
+        <a:font script="Syrj" typeface="Estrangelo Edessa"/>
+        <a:font script="Syre" typeface="Estrangelo Edessa"/>
+        <a:font script="Sora" typeface="Nirmala UI"/>
+        <a:font script="Tale" typeface="Microsoft Tai Le"/>
+        <a:font script="Talu" typeface="Microsoft New Tai Lue"/>
+        <a:font script="Tfng" typeface="Ebrima"/>
+      </a:minorFont>
+    </a:fontScheme>
+    <a:fmtScheme name="Office">
+      <a:fillStyleLst>
+        <a:solidFill>
+          <a:schemeClr val="phClr"/>
+        </a:solidFill>
+        <a:gradFill rotWithShape="1">
+          <a:gsLst>
+            <a:gs pos="0">
+              <a:schemeClr val="phClr">
+                <a:lumMod val="110000"/>
+                <a:satMod val="105000"/>
+                <a:tint val="67000"/>
+              </a:schemeClr>
+            </a:gs>
+            <a:gs pos="50000">
+              <a:schemeClr val="phClr">
+                <a:lumMod val="105000"/>
+                <a:satMod val="103000"/>
+                <a:tint val="73000"/>
+              </a:schemeClr>
+            </a:gs>
+            <a:gs pos="100000">
+              <a:schemeClr val="phClr">
+                <a:lumMod val="105000"/>
+                <a:satMod val="109000"/>
+                <a:tint val="81000"/>
+              </a:schemeClr>
+            </a:gs>
+          </a:gsLst>
+          <a:lin ang="5400000" scaled="0"/>
+        </a:gradFill>
+        <a:gradFill rotWithShape="1">
+          <a:gsLst>
+            <a:gs pos="0">
+              <a:schemeClr val="phClr">
+                <a:satMod val="103000"/>
+                <a:lumMod val="102000"/>
+                <a:tint val="94000"/>
+              </a:schemeClr>
+            </a:gs>
+            <a:gs pos="50000">
+              <a:schemeClr val="phClr">
+                <a:satMod val="110000"/>
+                <a:lumMod val="100000"/>
+                <a:shade val="100000"/>
+              </a:schemeClr>
+            </a:gs>
+            <a:gs pos="100000">
+              <a:schemeClr val="phClr">
+                <a:lumMod val="99000"/>
+                <a:satMod val="120000"/>
+                <a:shade val="78000"/>
+              </a:schemeClr>
+            </a:gs>
+          </a:gsLst>
+          <a:lin ang="5400000" scaled="0"/>
+        </a:gradFill>
+      </a:fillStyleLst>
+      <a:lnStyleLst>
+        <a:ln w="12700" cap="flat" cmpd="sng" algn="ctr">
+          <a:solidFill>
+            <a:schemeClr val="phClr"/>
+          </a:solidFill>
+          <a:prstDash val="solid"/>
+          <a:miter lim="800000"/>
+        </a:ln>
+        <a:ln w="19050" cap="flat" cmpd="sng" algn="ctr">
+          <a:solidFill>
+            <a:schemeClr val="phClr"/>
+          </a:solidFill>
+          <a:prstDash val="solid"/>
+          <a:miter lim="800000"/>
+        </a:ln>
+        <a:ln w="25400" cap="flat" cmpd="sng" algn="ctr">
+          <a:solidFill>
+            <a:schemeClr val="phClr"/>
+          </a:solidFill>
+          <a:prstDash val="solid"/>
+          <a:miter lim="800000"/>
+        </a:ln>
+      </a:lnStyleLst>
+      <a:effectStyleLst>
+        <a:effectStyle>
+          <a:effectLst/>
+        </a:effectStyle>
+        <a:effectStyle>
+          <a:effectLst/>
+        </a:effectStyle>
+        <a:effectStyle>
+          <a:effectLst>
+            <a:outerShdw blurRad="57150" dist="19050" dir="5400000" algn="ctr" rotWithShape="0">
+              <a:srgbClr val="000000">
+                <a:alpha val="63000"/>
+              </a:srgbClr>
+            </a:outerShdw>
+          </a:effectLst>
+        </a:effectStyle>
+      </a:effectStyleLst>
+      <a:bgFillStyleLst>
+        <a:solidFill>
+          <a:schemeClr val="phClr"/>
+        </a:solidFill>
+        <a:solidFill>
+          <a:schemeClr val="phClr">
+            <a:tint val="95000"/>
+            <a:satMod val="170000"/>
+          </a:schemeClr>
+        </a:solidFill>
+        <a:gradFill rotWithShape="1">
+          <a:gsLst>
+            <a:gs pos="0">
+              <a:schemeClr val="phClr">
+                <a:tint val="93000"/>
+                <a:satMod val="150000"/>
+                <a:shade val="98000"/>
+                <a:lumMod val="102000"/>
+              </a:schemeClr>
+            </a:gs>
+            <a:gs pos="50000">
+              <a:schemeClr val="phClr">
+                <a:tint val="98000"/>
+                <a:satMod val="130000"/>
+                <a:shade val="90000"/>
+                <a:lumMod val="103000"/>
+              </a:schemeClr>
+            </a:gs>
+            <a:gs pos="100000">
+              <a:schemeClr val="phClr">
+                <a:shade val="63000"/>
+                <a:satMod val="120000"/>
+              </a:schemeClr>
+            </a:gs>
+          </a:gsLst>
+          <a:lin ang="5400000" scaled="0"/>
+        </a:gradFill>
+      </a:bgFillStyleLst>
+    </a:fmtScheme>
+  </a:themeElements>
+  <a:objectDefaults>
+    <a:lnDef>
+      <a:spPr/>
+      <a:bodyPr/>
+      <a:lstStyle/>
+      <a:style>
+        <a:lnRef idx="2">
+          <a:schemeClr val="accent1"/>
+        </a:lnRef>
+        <a:fillRef idx="0">
+          <a:schemeClr val="accent1"/>
+        </a:fillRef>
+        <a:effectRef idx="1">
+          <a:schemeClr val="accent1"/>
+        </a:effectRef>
+        <a:fontRef idx="minor">
+          <a:schemeClr val="tx1"/>
+        </a:fontRef>
+      </a:style>
+    </a:lnDef>
+  </a:objectDefaults>
+  <a:extraClrSchemeLst/>
+  <a:extLst>
+    <a:ext uri="{05A4C25C-085E-4340-85A3-A5531E510DB2}">
+      <thm15:themeFamily xmlns:thm15="http://schemas.microsoft.com/office/thememl/2012/main" name="Office Theme" id="{2E142A2C-CD16-42D6-873A-C26D2A0506FA}" vid="{1BDDFF52-6CD6-40A5-AB3C-68EB2F1E4D0A}"/>
+    </a:ext>
+  </a:extLst>
+</a:theme>
 </file>
--- a/Assignment 1/MAS512_assignment1_gr5.pptx
+++ b/Assignment 1/MAS512_assignment1_gr5.pptx
@@ -6349,7 +6349,7 @@
                     <a:p>
                       <a:pPr algn="ctr"/>
                       <a:r>
-                        <a:rPr sz="1100" b="1" i="0">
+                        <a:rPr sz="1100" b="1" i="0" dirty="0">
                           <a:solidFill>
                             <a:srgbClr val="FFFFFF"/>
                           </a:solidFill>
@@ -6357,7 +6357,51 @@
                           <a:ea typeface="Calibri"/>
                           <a:cs typeface="Calibri"/>
                         </a:rPr>
-                        <a:t>Inference [ms/img]</a:t>
+                        <a:t>Inference [</a:t>
+                      </a:r>
+                      <a:r>
+                        <a:rPr sz="1100" b="1" i="0" dirty="0" err="1">
+                          <a:solidFill>
+                            <a:srgbClr val="FFFFFF"/>
+                          </a:solidFill>
+                          <a:latin typeface="Calibri"/>
+                          <a:ea typeface="Calibri"/>
+                          <a:cs typeface="Calibri"/>
+                        </a:rPr>
+                        <a:t>ms</a:t>
+                      </a:r>
+                      <a:r>
+                        <a:rPr sz="1100" b="1" i="0" dirty="0">
+                          <a:solidFill>
+                            <a:srgbClr val="FFFFFF"/>
+                          </a:solidFill>
+                          <a:latin typeface="Calibri"/>
+                          <a:ea typeface="Calibri"/>
+                          <a:cs typeface="Calibri"/>
+                        </a:rPr>
+                        <a:t>/</a:t>
+                      </a:r>
+                      <a:r>
+                        <a:rPr sz="1100" b="1" i="0" dirty="0" err="1">
+                          <a:solidFill>
+                            <a:srgbClr val="FFFFFF"/>
+                          </a:solidFill>
+                          <a:latin typeface="Calibri"/>
+                          <a:ea typeface="Calibri"/>
+                          <a:cs typeface="Calibri"/>
+                        </a:rPr>
+                        <a:t>img</a:t>
+                      </a:r>
+                      <a:r>
+                        <a:rPr sz="1100" b="1" i="0" dirty="0">
+                          <a:solidFill>
+                            <a:srgbClr val="FFFFFF"/>
+                          </a:solidFill>
+                          <a:latin typeface="Calibri"/>
+                          <a:ea typeface="Calibri"/>
+                          <a:cs typeface="Calibri"/>
+                        </a:rPr>
+                        <a:t>]</a:t>
                       </a:r>
                     </a:p>
                   </a:txBody>
@@ -10990,45 +11034,6 @@
           </a:prstGeom>
         </p:spPr>
       </p:pic>
-      <p:sp>
-        <p:nvSpPr>
-          <p:cNvPr id="10" name="TextBox 9"/>
-          <p:cNvSpPr txBox="1"/>
-          <p:nvPr/>
-        </p:nvSpPr>
-        <p:spPr>
-          <a:xfrm>
-            <a:off x="457200" y="4754880"/>
-            <a:ext cx="8229600" cy="274320"/>
-          </a:xfrm>
-          <a:prstGeom prst="rect">
-            <a:avLst/>
-          </a:prstGeom>
-          <a:noFill/>
-        </p:spPr>
-        <p:txBody>
-          <a:bodyPr wrap="square" lIns="0" tIns="0" rIns="0" bIns="0" anchor="ctr">
-            <a:spAutoFit/>
-          </a:bodyPr>
-          <a:lstStyle/>
-          <a:p>
-            <a:pPr marL="0" indent="0" algn="l">
-              <a:buNone/>
-            </a:pPr>
-            <a:r>
-              <a:rPr sz="900" b="0" i="0">
-                <a:solidFill>
-                  <a:srgbClr val="7C8494"/>
-                </a:solidFill>
-                <a:latin typeface="Calibri"/>
-                <a:ea typeface="Calibri"/>
-                <a:cs typeface="Calibri"/>
-              </a:rPr>
-              <a:t>Q6 · Train and val loss overlap → no overfitting.</a:t>
-            </a:r>
-          </a:p>
-        </p:txBody>
-      </p:sp>
     </p:spTree>
   </p:cSld>
   <p:clrMapOvr>
@@ -11554,98 +11559,6 @@
           </a:p>
         </p:txBody>
       </p:sp>
-      <p:sp>
-        <p:nvSpPr>
-          <p:cNvPr id="13" name="TextBox 12"/>
-          <p:cNvSpPr txBox="1"/>
-          <p:nvPr/>
-        </p:nvSpPr>
-        <p:spPr>
-          <a:xfrm>
-            <a:off x="4132332" y="4289929"/>
-            <a:ext cx="5166360" cy="184666"/>
-          </a:xfrm>
-          <a:prstGeom prst="rect">
-            <a:avLst/>
-          </a:prstGeom>
-          <a:noFill/>
-        </p:spPr>
-        <p:txBody>
-          <a:bodyPr wrap="square" lIns="0" tIns="0" rIns="0" bIns="0" anchor="t">
-            <a:spAutoFit/>
-          </a:bodyPr>
-          <a:lstStyle/>
-          <a:p>
-            <a:pPr>
-              <a:spcAft>
-                <a:spcPts val="480"/>
-              </a:spcAft>
-              <a:buSzPct val="100000"/>
-            </a:pPr>
-            <a:r>
-              <a:rPr lang="en-US" sz="1200" b="0" i="0" dirty="0">
-                <a:solidFill>
-                  <a:srgbClr val="23262F"/>
-                </a:solidFill>
-                <a:latin typeface="Calibri"/>
-                <a:ea typeface="Calibri"/>
-                <a:cs typeface="Calibri"/>
-              </a:rPr>
-              <a:t>Healthy motor </a:t>
-            </a:r>
-            <a:r>
-              <a:rPr sz="1200" b="0" i="0" dirty="0">
-                <a:solidFill>
-                  <a:srgbClr val="23262F"/>
-                </a:solidFill>
-                <a:latin typeface="Calibri"/>
-                <a:ea typeface="Calibri"/>
-                <a:cs typeface="Calibri"/>
-              </a:rPr>
-              <a:t>is reconstructed best</a:t>
-            </a:r>
-          </a:p>
-        </p:txBody>
-      </p:sp>
-      <p:sp>
-        <p:nvSpPr>
-          <p:cNvPr id="14" name="TextBox 13"/>
-          <p:cNvSpPr txBox="1"/>
-          <p:nvPr/>
-        </p:nvSpPr>
-        <p:spPr>
-          <a:xfrm>
-            <a:off x="457200" y="4754880"/>
-            <a:ext cx="8229600" cy="274320"/>
-          </a:xfrm>
-          <a:prstGeom prst="rect">
-            <a:avLst/>
-          </a:prstGeom>
-          <a:noFill/>
-        </p:spPr>
-        <p:txBody>
-          <a:bodyPr wrap="square" lIns="0" tIns="0" rIns="0" bIns="0" anchor="ctr">
-            <a:spAutoFit/>
-          </a:bodyPr>
-          <a:lstStyle/>
-          <a:p>
-            <a:pPr marL="0" indent="0" algn="l">
-              <a:buNone/>
-            </a:pPr>
-            <a:r>
-              <a:rPr sz="900" b="0" i="0">
-                <a:solidFill>
-                  <a:srgbClr val="7C8494"/>
-                </a:solidFill>
-                <a:latin typeface="Calibri"/>
-                <a:ea typeface="Calibri"/>
-                <a:cs typeface="Calibri"/>
-              </a:rPr>
-              <a:t>Q6 · Latent colour scale is shared within each figure.</a:t>
-            </a:r>
-          </a:p>
-        </p:txBody>
-      </p:sp>
     </p:spTree>
   </p:cSld>
   <p:clrMapOvr>
@@ -12119,8 +12032,8 @@
           </a:p>
         </p:txBody>
       </p:sp>
-      <mc:AlternateContent xmlns:mc="http://schemas.openxmlformats.org/markup-compatibility/2006">
-        <mc:Choice xmlns:a14="http://schemas.microsoft.com/office/drawing/2010/main" Requires="a14">
+      <mc:AlternateContent xmlns:mc="http://schemas.openxmlformats.org/markup-compatibility/2006" xmlns:a14="http://schemas.microsoft.com/office/drawing/2010/main">
+        <mc:Choice Requires="a14">
           <p:sp>
             <p:nvSpPr>
               <p:cNvPr id="14" name="Text 12"/>
@@ -12187,7 +12100,7 @@
             </p:txBody>
           </p:sp>
         </mc:Choice>
-        <mc:Fallback>
+        <mc:Fallback xmlns="">
           <p:sp>
             <p:nvSpPr>
               <p:cNvPr id="14" name="Text 12"/>
@@ -12441,7 +12354,7 @@
                 <a:ea typeface="Calibri" pitchFamily="34" charset="-122"/>
                 <a:cs typeface="Calibri" pitchFamily="34" charset="-120"/>
               </a:rPr>
-              <a:t>Autoencoder: 10 500 → 32 values, mean MSE ≈ 0.0005 for both classes</a:t>
+              <a:t>mean MSE ≈ 0.0005 for both classes</a:t>
             </a:r>
             <a:endParaRPr lang="en-US" sz="1300" dirty="0"/>
           </a:p>
